--- a/gov-report/数智赋能政府治理.pptx
+++ b/gov-report/数智赋能政府治理.pptx
@@ -15676,6 +15676,3280 @@
 </p:sld>
 </file>
 
+<file path=ppt/slides/slide26.xml><?xml version="1.0" encoding="utf-8"?>
+<p:sld xmlns:a="http://schemas.openxmlformats.org/drawingml/2006/main" xmlns:r="http://schemas.openxmlformats.org/officeDocument/2006/relationships" xmlns:p="http://schemas.openxmlformats.org/presentationml/2006/main">
+  <p:cSld name="Slide 1">
+    <p:bg>
+      <p:bgPr>
+        <a:solidFill>
+          <a:srgbClr val="F5F7FA"/>
+        </a:solidFill>
+      </p:bgPr>
+    </p:bg>
+    <p:spTree>
+      <p:nvGrpSpPr>
+        <p:cNvPr id="1" name=""/>
+        <p:cNvGrpSpPr/>
+        <p:nvPr/>
+      </p:nvGrpSpPr>
+      <p:grpSpPr>
+        <a:xfrm>
+          <a:off x="0" y="0"/>
+          <a:ext cx="0" cy="0"/>
+          <a:chOff x="0" y="0"/>
+          <a:chExt cx="0" cy="0"/>
+        </a:xfrm>
+      </p:grpSpPr>
+      <p:sp>
+        <p:nvSpPr>
+          <p:cNvPr id="2" name="Shape 0"/>
+          <p:cNvSpPr/>
+          <p:nvPr/>
+        </p:nvSpPr>
+        <p:spPr>
+          <a:xfrm>
+            <a:off x="0" y="0"/>
+            <a:ext cx="9144000" cy="822960"/>
+          </a:xfrm>
+          <a:prstGeom prst="rect">
+            <a:avLst/>
+          </a:prstGeom>
+          <a:solidFill>
+            <a:srgbClr val="1B3A5C"/>
+          </a:solidFill>
+          <a:ln/>
+        </p:spPr>
+      </p:sp>
+      <p:sp>
+        <p:nvSpPr>
+          <p:cNvPr id="3" name="Text 1"/>
+          <p:cNvSpPr/>
+          <p:nvPr/>
+        </p:nvSpPr>
+        <p:spPr>
+          <a:xfrm>
+            <a:off x="365760" y="109728"/>
+            <a:ext cx="457200" cy="594360"/>
+          </a:xfrm>
+          <a:prstGeom prst="rect">
+            <a:avLst/>
+          </a:prstGeom>
+          <a:noFill/>
+          <a:ln/>
+        </p:spPr>
+        <p:txBody>
+          <a:bodyPr wrap="square" rtlCol="0" anchor="ctr"/>
+          <a:lstStyle/>
+          <a:p>
+            <a:pPr algn="ctr" indent="0" marL="0">
+              <a:buNone/>
+            </a:pPr>
+            <a:r>
+              <a:rPr lang="en-US" sz="2000" b="1" dirty="0">
+                <a:solidFill>
+                  <a:srgbClr val="C99A2A"/>
+                </a:solidFill>
+                <a:latin typeface="Georgia" pitchFamily="34" charset="0"/>
+                <a:ea typeface="Georgia" pitchFamily="34" charset="-122"/>
+                <a:cs typeface="Georgia" pitchFamily="34" charset="-120"/>
+              </a:rPr>
+              <a:t>12</a:t>
+            </a:r>
+            <a:endParaRPr lang="en-US" sz="2000" dirty="0"/>
+          </a:p>
+        </p:txBody>
+      </p:sp>
+      <p:sp>
+        <p:nvSpPr>
+          <p:cNvPr id="4" name="Text 2"/>
+          <p:cNvSpPr/>
+          <p:nvPr/>
+        </p:nvSpPr>
+        <p:spPr>
+          <a:xfrm>
+            <a:off x="868680" y="109728"/>
+            <a:ext cx="7772400" cy="594360"/>
+          </a:xfrm>
+          <a:prstGeom prst="rect">
+            <a:avLst/>
+          </a:prstGeom>
+          <a:noFill/>
+          <a:ln/>
+        </p:spPr>
+        <p:txBody>
+          <a:bodyPr wrap="square" rtlCol="0" anchor="ctr"/>
+          <a:lstStyle/>
+          <a:p>
+            <a:pPr indent="0" marL="0">
+              <a:buNone/>
+            </a:pPr>
+            <a:r>
+              <a:rPr lang="en-US" sz="2000" b="1" dirty="0">
+                <a:solidFill>
+                  <a:srgbClr val="FFFFFF"/>
+                </a:solidFill>
+                <a:latin typeface="Georgia" pitchFamily="34" charset="0"/>
+                <a:ea typeface="Georgia" pitchFamily="34" charset="-122"/>
+                <a:cs typeface="Georgia" pitchFamily="34" charset="-120"/>
+              </a:rPr>
+              <a:t>人工智能赋能：从“数字化”走向“智能化”</a:t>
+            </a:r>
+            <a:endParaRPr lang="en-US" sz="2000" dirty="0"/>
+          </a:p>
+        </p:txBody>
+      </p:sp>
+      <p:sp>
+        <p:nvSpPr>
+          <p:cNvPr id="5" name="Shape 3"/>
+          <p:cNvSpPr/>
+          <p:nvPr/>
+        </p:nvSpPr>
+        <p:spPr>
+          <a:xfrm>
+            <a:off x="0" y="822960"/>
+            <a:ext cx="9144000" cy="27432"/>
+          </a:xfrm>
+          <a:prstGeom prst="rect">
+            <a:avLst/>
+          </a:prstGeom>
+          <a:solidFill>
+            <a:srgbClr val="C99A2A"/>
+          </a:solidFill>
+          <a:ln/>
+        </p:spPr>
+      </p:sp>
+      <p:sp>
+        <p:nvSpPr>
+          <p:cNvPr id="6" name="Text 4"/>
+          <p:cNvSpPr/>
+          <p:nvPr/>
+        </p:nvSpPr>
+        <p:spPr>
+          <a:xfrm>
+            <a:off x="8229600" y="4800600"/>
+            <a:ext cx="640080" cy="274320"/>
+          </a:xfrm>
+          <a:prstGeom prst="rect">
+            <a:avLst/>
+          </a:prstGeom>
+          <a:noFill/>
+          <a:ln/>
+        </p:spPr>
+        <p:txBody>
+          <a:bodyPr wrap="square" rtlCol="0" anchor="ctr"/>
+          <a:lstStyle/>
+          <a:p>
+            <a:pPr algn="r" indent="0" marL="0">
+              <a:buNone/>
+            </a:pPr>
+            <a:r>
+              <a:rPr lang="en-US" sz="900" dirty="0">
+                <a:solidFill>
+                  <a:srgbClr val="888899"/>
+                </a:solidFill>
+                <a:latin typeface="Georgia" pitchFamily="34" charset="0"/>
+                <a:ea typeface="Georgia" pitchFamily="34" charset="-122"/>
+                <a:cs typeface="Georgia" pitchFamily="34" charset="-120"/>
+              </a:rPr>
+              <a:t>13</a:t>
+            </a:r>
+            <a:endParaRPr lang="en-US" sz="900" dirty="0"/>
+          </a:p>
+        </p:txBody>
+      </p:sp>
+      <p:sp>
+        <p:nvSpPr>
+          <p:cNvPr id="7" name="Shape 5"/>
+          <p:cNvSpPr/>
+          <p:nvPr/>
+        </p:nvSpPr>
+        <p:spPr>
+          <a:xfrm>
+            <a:off x="365760" y="1097280"/>
+            <a:ext cx="4206240" cy="3474720"/>
+          </a:xfrm>
+          <a:prstGeom prst="rect">
+            <a:avLst/>
+          </a:prstGeom>
+          <a:solidFill>
+            <a:srgbClr val="FFFFFF"/>
+          </a:solidFill>
+          <a:ln/>
+          <a:effectLst>
+            <a:outerShdw sx="100000" sy="100000" kx="0" ky="0" algn="bl" rotWithShape="0" blurRad="101600" dist="25400" dir="8100000">
+              <a:srgbClr val="000000">
+                <a:alpha val="10000"/>
+              </a:srgbClr>
+            </a:outerShdw>
+          </a:effectLst>
+        </p:spPr>
+      </p:sp>
+      <p:sp>
+        <p:nvSpPr>
+          <p:cNvPr id="8" name="Text 6"/>
+          <p:cNvSpPr/>
+          <p:nvPr/>
+        </p:nvSpPr>
+        <p:spPr>
+          <a:xfrm>
+            <a:off x="548640" y="1188720"/>
+            <a:ext cx="3840480" cy="1463040"/>
+          </a:xfrm>
+          <a:prstGeom prst="rect">
+            <a:avLst/>
+          </a:prstGeom>
+          <a:noFill/>
+          <a:ln/>
+        </p:spPr>
+        <p:txBody>
+          <a:bodyPr wrap="square" rtlCol="0" anchor="ctr"/>
+          <a:lstStyle/>
+          <a:p>
+            <a:pPr indent="0" marL="0">
+              <a:buNone/>
+            </a:pPr>
+            <a:r>
+              <a:rPr lang="en-US" sz="1400" b="1" dirty="0">
+                <a:solidFill>
+                  <a:srgbClr val="1B3A5C"/>
+                </a:solidFill>
+                <a:latin typeface="Georgia" pitchFamily="34" charset="0"/>
+                <a:ea typeface="Georgia" pitchFamily="34" charset="-122"/>
+                <a:cs typeface="Georgia" pitchFamily="34" charset="-120"/>
+              </a:rPr>
+              <a:t>重大转变</a:t>
+            </a:r>
+            <a:endParaRPr lang="en-US" sz="1400" dirty="0"/>
+          </a:p>
+          <a:p>
+            <a:pPr indent="0" marL="0">
+              <a:buNone/>
+            </a:pPr>
+            <a:endParaRPr lang="en-US" sz="1400" dirty="0"/>
+          </a:p>
+          <a:p>
+            <a:pPr indent="0" marL="0">
+              <a:buNone/>
+            </a:pPr>
+            <a:r>
+              <a:rPr lang="en-US" sz="1100" dirty="0">
+                <a:solidFill>
+                  <a:srgbClr val="444466"/>
+                </a:solidFill>
+                <a:latin typeface="Microsoft YaHei" pitchFamily="34" charset="0"/>
+                <a:ea typeface="Microsoft YaHei" pitchFamily="34" charset="-122"/>
+                <a:cs typeface="Microsoft YaHei" pitchFamily="34" charset="-120"/>
+              </a:rPr>
+              <a:t>如果说数字化转型的核心是“数据通”，那么智能化转型的核心就是“机器懂”。</a:t>
+            </a:r>
+            <a:endParaRPr lang="en-US" sz="1400" dirty="0"/>
+          </a:p>
+          <a:p>
+            <a:pPr indent="0" marL="0">
+              <a:buNone/>
+            </a:pPr>
+            <a:endParaRPr lang="en-US" sz="1400" dirty="0"/>
+          </a:p>
+          <a:p>
+            <a:pPr indent="0" marL="0">
+              <a:buNone/>
+            </a:pPr>
+            <a:r>
+              <a:rPr lang="en-US" sz="1300" b="1" dirty="0">
+                <a:solidFill>
+                  <a:srgbClr val="1B3A5C"/>
+                </a:solidFill>
+                <a:latin typeface="Microsoft YaHei" pitchFamily="34" charset="0"/>
+                <a:ea typeface="Microsoft YaHei" pitchFamily="34" charset="-122"/>
+                <a:cs typeface="Microsoft YaHei" pitchFamily="34" charset="-120"/>
+              </a:rPr>
+              <a:t>三个关键变化</a:t>
+            </a:r>
+            <a:endParaRPr lang="en-US" sz="1400" dirty="0"/>
+          </a:p>
+          <a:p>
+            <a:pPr indent="0" marL="0">
+              <a:buNone/>
+            </a:pPr>
+            <a:endParaRPr lang="en-US" sz="1400" dirty="0"/>
+          </a:p>
+        </p:txBody>
+      </p:sp>
+      <p:sp>
+        <p:nvSpPr>
+          <p:cNvPr id="9" name="Shape 7"/>
+          <p:cNvSpPr/>
+          <p:nvPr/>
+        </p:nvSpPr>
+        <p:spPr>
+          <a:xfrm>
+            <a:off x="548640" y="2651760"/>
+            <a:ext cx="54864" cy="411480"/>
+          </a:xfrm>
+          <a:prstGeom prst="rect">
+            <a:avLst/>
+          </a:prstGeom>
+          <a:solidFill>
+            <a:srgbClr val="C99A2A"/>
+          </a:solidFill>
+          <a:ln/>
+        </p:spPr>
+      </p:sp>
+      <p:sp>
+        <p:nvSpPr>
+          <p:cNvPr id="10" name="Text 8"/>
+          <p:cNvSpPr/>
+          <p:nvPr/>
+        </p:nvSpPr>
+        <p:spPr>
+          <a:xfrm>
+            <a:off x="731520" y="2651760"/>
+            <a:ext cx="365760" cy="411480"/>
+          </a:xfrm>
+          <a:prstGeom prst="rect">
+            <a:avLst/>
+          </a:prstGeom>
+          <a:noFill/>
+          <a:ln/>
+        </p:spPr>
+        <p:txBody>
+          <a:bodyPr wrap="square" rtlCol="0" anchor="ctr"/>
+          <a:lstStyle/>
+          <a:p>
+            <a:pPr indent="0" marL="0">
+              <a:buNone/>
+            </a:pPr>
+            <a:r>
+              <a:rPr lang="en-US" sz="1200" b="1" dirty="0">
+                <a:solidFill>
+                  <a:srgbClr val="C99A2A"/>
+                </a:solidFill>
+                <a:latin typeface="Georgia" pitchFamily="34" charset="0"/>
+                <a:ea typeface="Georgia" pitchFamily="34" charset="-122"/>
+                <a:cs typeface="Georgia" pitchFamily="34" charset="-120"/>
+              </a:rPr>
+              <a:t>01</a:t>
+            </a:r>
+            <a:endParaRPr lang="en-US" sz="1200" dirty="0"/>
+          </a:p>
+        </p:txBody>
+      </p:sp>
+      <p:sp>
+        <p:nvSpPr>
+          <p:cNvPr id="11" name="Text 9"/>
+          <p:cNvSpPr/>
+          <p:nvPr/>
+        </p:nvSpPr>
+        <p:spPr>
+          <a:xfrm>
+            <a:off x="1188720" y="2651760"/>
+            <a:ext cx="3200400" cy="228600"/>
+          </a:xfrm>
+          <a:prstGeom prst="rect">
+            <a:avLst/>
+          </a:prstGeom>
+          <a:noFill/>
+          <a:ln/>
+        </p:spPr>
+        <p:txBody>
+          <a:bodyPr wrap="square" rtlCol="0" anchor="ctr"/>
+          <a:lstStyle/>
+          <a:p>
+            <a:pPr indent="0" marL="0">
+              <a:buNone/>
+            </a:pPr>
+            <a:r>
+              <a:rPr lang="en-US" sz="1100" b="1" dirty="0">
+                <a:solidFill>
+                  <a:srgbClr val="1B3A5C"/>
+                </a:solidFill>
+                <a:latin typeface="Microsoft YaHei" pitchFamily="34" charset="0"/>
+                <a:ea typeface="Microsoft YaHei" pitchFamily="34" charset="-122"/>
+                <a:cs typeface="Microsoft YaHei" pitchFamily="34" charset="-120"/>
+              </a:rPr>
+              <a:t>从“人找服务”到“服务找人”</a:t>
+            </a:r>
+            <a:endParaRPr lang="en-US" sz="1100" dirty="0"/>
+          </a:p>
+        </p:txBody>
+      </p:sp>
+      <p:sp>
+        <p:nvSpPr>
+          <p:cNvPr id="12" name="Text 10"/>
+          <p:cNvSpPr/>
+          <p:nvPr/>
+        </p:nvSpPr>
+        <p:spPr>
+          <a:xfrm>
+            <a:off x="1188720" y="2880360"/>
+            <a:ext cx="3200400" cy="182880"/>
+          </a:xfrm>
+          <a:prstGeom prst="rect">
+            <a:avLst/>
+          </a:prstGeom>
+          <a:noFill/>
+          <a:ln/>
+        </p:spPr>
+        <p:txBody>
+          <a:bodyPr wrap="square" rtlCol="0" anchor="t"/>
+          <a:lstStyle/>
+          <a:p>
+            <a:pPr indent="0" marL="0">
+              <a:buNone/>
+            </a:pPr>
+            <a:r>
+              <a:rPr lang="en-US" sz="800" dirty="0">
+                <a:solidFill>
+                  <a:srgbClr val="444466"/>
+                </a:solidFill>
+                <a:latin typeface="Microsoft YaHei" pitchFamily="34" charset="0"/>
+                <a:ea typeface="Microsoft YaHei" pitchFamily="34" charset="-122"/>
+                <a:cs typeface="Microsoft YaHei" pitchFamily="34" charset="-120"/>
+              </a:rPr>
+              <a:t>AI主动发现需求，政策精准推送，无需市民自行搜索</a:t>
+            </a:r>
+            <a:endParaRPr lang="en-US" sz="800" dirty="0"/>
+          </a:p>
+        </p:txBody>
+      </p:sp>
+      <p:sp>
+        <p:nvSpPr>
+          <p:cNvPr id="13" name="Shape 11"/>
+          <p:cNvSpPr/>
+          <p:nvPr/>
+        </p:nvSpPr>
+        <p:spPr>
+          <a:xfrm>
+            <a:off x="548640" y="3291840"/>
+            <a:ext cx="54864" cy="411480"/>
+          </a:xfrm>
+          <a:prstGeom prst="rect">
+            <a:avLst/>
+          </a:prstGeom>
+          <a:solidFill>
+            <a:srgbClr val="C99A2A"/>
+          </a:solidFill>
+          <a:ln/>
+        </p:spPr>
+      </p:sp>
+      <p:sp>
+        <p:nvSpPr>
+          <p:cNvPr id="14" name="Text 12"/>
+          <p:cNvSpPr/>
+          <p:nvPr/>
+        </p:nvSpPr>
+        <p:spPr>
+          <a:xfrm>
+            <a:off x="731520" y="3291840"/>
+            <a:ext cx="365760" cy="411480"/>
+          </a:xfrm>
+          <a:prstGeom prst="rect">
+            <a:avLst/>
+          </a:prstGeom>
+          <a:noFill/>
+          <a:ln/>
+        </p:spPr>
+        <p:txBody>
+          <a:bodyPr wrap="square" rtlCol="0" anchor="ctr"/>
+          <a:lstStyle/>
+          <a:p>
+            <a:pPr indent="0" marL="0">
+              <a:buNone/>
+            </a:pPr>
+            <a:r>
+              <a:rPr lang="en-US" sz="1200" b="1" dirty="0">
+                <a:solidFill>
+                  <a:srgbClr val="C99A2A"/>
+                </a:solidFill>
+                <a:latin typeface="Georgia" pitchFamily="34" charset="0"/>
+                <a:ea typeface="Georgia" pitchFamily="34" charset="-122"/>
+                <a:cs typeface="Georgia" pitchFamily="34" charset="-120"/>
+              </a:rPr>
+              <a:t>02</a:t>
+            </a:r>
+            <a:endParaRPr lang="en-US" sz="1200" dirty="0"/>
+          </a:p>
+        </p:txBody>
+      </p:sp>
+      <p:sp>
+        <p:nvSpPr>
+          <p:cNvPr id="15" name="Text 13"/>
+          <p:cNvSpPr/>
+          <p:nvPr/>
+        </p:nvSpPr>
+        <p:spPr>
+          <a:xfrm>
+            <a:off x="1188720" y="3291840"/>
+            <a:ext cx="3200400" cy="228600"/>
+          </a:xfrm>
+          <a:prstGeom prst="rect">
+            <a:avLst/>
+          </a:prstGeom>
+          <a:noFill/>
+          <a:ln/>
+        </p:spPr>
+        <p:txBody>
+          <a:bodyPr wrap="square" rtlCol="0" anchor="ctr"/>
+          <a:lstStyle/>
+          <a:p>
+            <a:pPr indent="0" marL="0">
+              <a:buNone/>
+            </a:pPr>
+            <a:r>
+              <a:rPr lang="en-US" sz="1100" b="1" dirty="0">
+                <a:solidFill>
+                  <a:srgbClr val="1B3A5C"/>
+                </a:solidFill>
+                <a:latin typeface="Microsoft YaHei" pitchFamily="34" charset="0"/>
+                <a:ea typeface="Microsoft YaHei" pitchFamily="34" charset="-122"/>
+                <a:cs typeface="Microsoft YaHei" pitchFamily="34" charset="-120"/>
+              </a:rPr>
+              <a:t>从“人工巡查”到“AI巡检”</a:t>
+            </a:r>
+            <a:endParaRPr lang="en-US" sz="1100" dirty="0"/>
+          </a:p>
+        </p:txBody>
+      </p:sp>
+      <p:sp>
+        <p:nvSpPr>
+          <p:cNvPr id="16" name="Text 14"/>
+          <p:cNvSpPr/>
+          <p:nvPr/>
+        </p:nvSpPr>
+        <p:spPr>
+          <a:xfrm>
+            <a:off x="1188720" y="3520440"/>
+            <a:ext cx="3200400" cy="182880"/>
+          </a:xfrm>
+          <a:prstGeom prst="rect">
+            <a:avLst/>
+          </a:prstGeom>
+          <a:noFill/>
+          <a:ln/>
+        </p:spPr>
+        <p:txBody>
+          <a:bodyPr wrap="square" rtlCol="0" anchor="t"/>
+          <a:lstStyle/>
+          <a:p>
+            <a:pPr indent="0" marL="0">
+              <a:buNone/>
+            </a:pPr>
+            <a:r>
+              <a:rPr lang="en-US" sz="800" dirty="0">
+                <a:solidFill>
+                  <a:srgbClr val="444466"/>
+                </a:solidFill>
+                <a:latin typeface="Microsoft YaHei" pitchFamily="34" charset="0"/>
+                <a:ea typeface="Microsoft YaHei" pitchFamily="34" charset="-122"/>
+                <a:cs typeface="Microsoft YaHei" pitchFamily="34" charset="-120"/>
+              </a:rPr>
+              <a:t>计算机视觉自动识别城市管理问题，效率提升数倍</a:t>
+            </a:r>
+            <a:endParaRPr lang="en-US" sz="800" dirty="0"/>
+          </a:p>
+        </p:txBody>
+      </p:sp>
+      <p:sp>
+        <p:nvSpPr>
+          <p:cNvPr id="17" name="Shape 15"/>
+          <p:cNvSpPr/>
+          <p:nvPr/>
+        </p:nvSpPr>
+        <p:spPr>
+          <a:xfrm>
+            <a:off x="548640" y="3931920"/>
+            <a:ext cx="54864" cy="411480"/>
+          </a:xfrm>
+          <a:prstGeom prst="rect">
+            <a:avLst/>
+          </a:prstGeom>
+          <a:solidFill>
+            <a:srgbClr val="C99A2A"/>
+          </a:solidFill>
+          <a:ln/>
+        </p:spPr>
+      </p:sp>
+      <p:sp>
+        <p:nvSpPr>
+          <p:cNvPr id="18" name="Text 16"/>
+          <p:cNvSpPr/>
+          <p:nvPr/>
+        </p:nvSpPr>
+        <p:spPr>
+          <a:xfrm>
+            <a:off x="731520" y="3931920"/>
+            <a:ext cx="365760" cy="411480"/>
+          </a:xfrm>
+          <a:prstGeom prst="rect">
+            <a:avLst/>
+          </a:prstGeom>
+          <a:noFill/>
+          <a:ln/>
+        </p:spPr>
+        <p:txBody>
+          <a:bodyPr wrap="square" rtlCol="0" anchor="ctr"/>
+          <a:lstStyle/>
+          <a:p>
+            <a:pPr indent="0" marL="0">
+              <a:buNone/>
+            </a:pPr>
+            <a:r>
+              <a:rPr lang="en-US" sz="1200" b="1" dirty="0">
+                <a:solidFill>
+                  <a:srgbClr val="C99A2A"/>
+                </a:solidFill>
+                <a:latin typeface="Georgia" pitchFamily="34" charset="0"/>
+                <a:ea typeface="Georgia" pitchFamily="34" charset="-122"/>
+                <a:cs typeface="Georgia" pitchFamily="34" charset="-120"/>
+              </a:rPr>
+              <a:t>03</a:t>
+            </a:r>
+            <a:endParaRPr lang="en-US" sz="1200" dirty="0"/>
+          </a:p>
+        </p:txBody>
+      </p:sp>
+      <p:sp>
+        <p:nvSpPr>
+          <p:cNvPr id="19" name="Text 17"/>
+          <p:cNvSpPr/>
+          <p:nvPr/>
+        </p:nvSpPr>
+        <p:spPr>
+          <a:xfrm>
+            <a:off x="1188720" y="3931920"/>
+            <a:ext cx="3200400" cy="228600"/>
+          </a:xfrm>
+          <a:prstGeom prst="rect">
+            <a:avLst/>
+          </a:prstGeom>
+          <a:noFill/>
+          <a:ln/>
+        </p:spPr>
+        <p:txBody>
+          <a:bodyPr wrap="square" rtlCol="0" anchor="ctr"/>
+          <a:lstStyle/>
+          <a:p>
+            <a:pPr indent="0" marL="0">
+              <a:buNone/>
+            </a:pPr>
+            <a:r>
+              <a:rPr lang="en-US" sz="1100" b="1" dirty="0">
+                <a:solidFill>
+                  <a:srgbClr val="1B3A5C"/>
+                </a:solidFill>
+                <a:latin typeface="Microsoft YaHei" pitchFamily="34" charset="0"/>
+                <a:ea typeface="Microsoft YaHei" pitchFamily="34" charset="-122"/>
+                <a:cs typeface="Microsoft YaHei" pitchFamily="34" charset="-120"/>
+              </a:rPr>
+              <a:t>从“经验决策”到“算法辅助”</a:t>
+            </a:r>
+            <a:endParaRPr lang="en-US" sz="1100" dirty="0"/>
+          </a:p>
+        </p:txBody>
+      </p:sp>
+      <p:sp>
+        <p:nvSpPr>
+          <p:cNvPr id="20" name="Text 18"/>
+          <p:cNvSpPr/>
+          <p:nvPr/>
+        </p:nvSpPr>
+        <p:spPr>
+          <a:xfrm>
+            <a:off x="1188720" y="4160520"/>
+            <a:ext cx="3200400" cy="182880"/>
+          </a:xfrm>
+          <a:prstGeom prst="rect">
+            <a:avLst/>
+          </a:prstGeom>
+          <a:noFill/>
+          <a:ln/>
+        </p:spPr>
+        <p:txBody>
+          <a:bodyPr wrap="square" rtlCol="0" anchor="t"/>
+          <a:lstStyle/>
+          <a:p>
+            <a:pPr indent="0" marL="0">
+              <a:buNone/>
+            </a:pPr>
+            <a:r>
+              <a:rPr lang="en-US" sz="800" dirty="0">
+                <a:solidFill>
+                  <a:srgbClr val="444466"/>
+                </a:solidFill>
+                <a:latin typeface="Microsoft YaHei" pitchFamily="34" charset="0"/>
+                <a:ea typeface="Microsoft YaHei" pitchFamily="34" charset="-122"/>
+                <a:cs typeface="Microsoft YaHei" pitchFamily="34" charset="-120"/>
+              </a:rPr>
+              <a:t>大模型分析海量数据辅助决策，降低人为偏差</a:t>
+            </a:r>
+            <a:endParaRPr lang="en-US" sz="800" dirty="0"/>
+          </a:p>
+        </p:txBody>
+      </p:sp>
+      <p:sp>
+        <p:nvSpPr>
+          <p:cNvPr id="21" name="Shape 19"/>
+          <p:cNvSpPr/>
+          <p:nvPr/>
+        </p:nvSpPr>
+        <p:spPr>
+          <a:xfrm>
+            <a:off x="4754880" y="1097280"/>
+            <a:ext cx="4114800" cy="3474720"/>
+          </a:xfrm>
+          <a:prstGeom prst="rect">
+            <a:avLst/>
+          </a:prstGeom>
+          <a:solidFill>
+            <a:srgbClr val="FFFFFF"/>
+          </a:solidFill>
+          <a:ln/>
+          <a:effectLst>
+            <a:outerShdw sx="100000" sy="100000" kx="0" ky="0" algn="bl" rotWithShape="0" blurRad="101600" dist="25400" dir="8100000">
+              <a:srgbClr val="000000">
+                <a:alpha val="10000"/>
+              </a:srgbClr>
+            </a:outerShdw>
+          </a:effectLst>
+        </p:spPr>
+      </p:sp>
+      <p:sp>
+        <p:nvSpPr>
+          <p:cNvPr id="22" name="Shape 20"/>
+          <p:cNvSpPr/>
+          <p:nvPr/>
+        </p:nvSpPr>
+        <p:spPr>
+          <a:xfrm>
+            <a:off x="4754880" y="1097280"/>
+            <a:ext cx="4114800" cy="457200"/>
+          </a:xfrm>
+          <a:prstGeom prst="rect">
+            <a:avLst/>
+          </a:prstGeom>
+          <a:solidFill>
+            <a:srgbClr val="1B3A5C"/>
+          </a:solidFill>
+          <a:ln/>
+        </p:spPr>
+      </p:sp>
+      <p:sp>
+        <p:nvSpPr>
+          <p:cNvPr id="23" name="Text 21"/>
+          <p:cNvSpPr/>
+          <p:nvPr/>
+        </p:nvSpPr>
+        <p:spPr>
+          <a:xfrm>
+            <a:off x="4937760" y="1143000"/>
+            <a:ext cx="3657600" cy="365760"/>
+          </a:xfrm>
+          <a:prstGeom prst="rect">
+            <a:avLst/>
+          </a:prstGeom>
+          <a:noFill/>
+          <a:ln/>
+        </p:spPr>
+        <p:txBody>
+          <a:bodyPr wrap="square" rtlCol="0" anchor="ctr"/>
+          <a:lstStyle/>
+          <a:p>
+            <a:pPr indent="0" marL="0">
+              <a:buNone/>
+            </a:pPr>
+            <a:r>
+              <a:rPr lang="en-US" sz="1300" b="1" dirty="0">
+                <a:solidFill>
+                  <a:srgbClr val="FFFFFF"/>
+                </a:solidFill>
+                <a:latin typeface="Georgia" pitchFamily="34" charset="0"/>
+                <a:ea typeface="Georgia" pitchFamily="34" charset="-122"/>
+                <a:cs typeface="Georgia" pitchFamily="34" charset="-120"/>
+              </a:rPr>
+              <a:t>典型应用场景</a:t>
+            </a:r>
+            <a:endParaRPr lang="en-US" sz="1300" dirty="0"/>
+          </a:p>
+        </p:txBody>
+      </p:sp>
+      <p:sp>
+        <p:nvSpPr>
+          <p:cNvPr id="24" name="Text 22"/>
+          <p:cNvSpPr/>
+          <p:nvPr/>
+        </p:nvSpPr>
+        <p:spPr>
+          <a:xfrm>
+            <a:off x="4937760" y="1737360"/>
+            <a:ext cx="3749040" cy="228600"/>
+          </a:xfrm>
+          <a:prstGeom prst="rect">
+            <a:avLst/>
+          </a:prstGeom>
+          <a:noFill/>
+          <a:ln/>
+        </p:spPr>
+        <p:txBody>
+          <a:bodyPr wrap="square" rtlCol="0" anchor="ctr"/>
+          <a:lstStyle/>
+          <a:p>
+            <a:pPr indent="0" marL="0">
+              <a:buNone/>
+            </a:pPr>
+            <a:r>
+              <a:rPr lang="en-US" sz="1100" b="1" dirty="0">
+                <a:solidFill>
+                  <a:srgbClr val="1B3A5C"/>
+                </a:solidFill>
+                <a:latin typeface="Microsoft YaHei" pitchFamily="34" charset="0"/>
+                <a:ea typeface="Microsoft YaHei" pitchFamily="34" charset="-122"/>
+                <a:cs typeface="Microsoft YaHei" pitchFamily="34" charset="-120"/>
+              </a:rPr>
+              <a:t>政务大模型问答</a:t>
+            </a:r>
+            <a:endParaRPr lang="en-US" sz="1100" dirty="0"/>
+          </a:p>
+        </p:txBody>
+      </p:sp>
+      <p:sp>
+        <p:nvSpPr>
+          <p:cNvPr id="25" name="Text 23"/>
+          <p:cNvSpPr/>
+          <p:nvPr/>
+        </p:nvSpPr>
+        <p:spPr>
+          <a:xfrm>
+            <a:off x="4937760" y="1965960"/>
+            <a:ext cx="3749040" cy="365760"/>
+          </a:xfrm>
+          <a:prstGeom prst="rect">
+            <a:avLst/>
+          </a:prstGeom>
+          <a:noFill/>
+          <a:ln/>
+        </p:spPr>
+        <p:txBody>
+          <a:bodyPr wrap="square" rtlCol="0" anchor="t"/>
+          <a:lstStyle/>
+          <a:p>
+            <a:pPr indent="0" marL="0">
+              <a:buNone/>
+            </a:pPr>
+            <a:r>
+              <a:rPr lang="en-US" sz="900" dirty="0">
+                <a:solidFill>
+                  <a:srgbClr val="444466"/>
+                </a:solidFill>
+                <a:latin typeface="Microsoft YaHei" pitchFamily="34" charset="0"/>
+                <a:ea typeface="Microsoft YaHei" pitchFamily="34" charset="-122"/>
+                <a:cs typeface="Microsoft YaHei" pitchFamily="34" charset="-120"/>
+              </a:rPr>
+              <a:t>深圳“深政助手”接入DeepSeek，公务员政策咨询响应时效从小时级降至秒级</a:t>
+            </a:r>
+            <a:endParaRPr lang="en-US" sz="900" dirty="0"/>
+          </a:p>
+        </p:txBody>
+      </p:sp>
+      <p:sp>
+        <p:nvSpPr>
+          <p:cNvPr id="26" name="Text 24"/>
+          <p:cNvSpPr/>
+          <p:nvPr/>
+        </p:nvSpPr>
+        <p:spPr>
+          <a:xfrm>
+            <a:off x="4937760" y="2450592"/>
+            <a:ext cx="3749040" cy="228600"/>
+          </a:xfrm>
+          <a:prstGeom prst="rect">
+            <a:avLst/>
+          </a:prstGeom>
+          <a:noFill/>
+          <a:ln/>
+        </p:spPr>
+        <p:txBody>
+          <a:bodyPr wrap="square" rtlCol="0" anchor="ctr"/>
+          <a:lstStyle/>
+          <a:p>
+            <a:pPr indent="0" marL="0">
+              <a:buNone/>
+            </a:pPr>
+            <a:r>
+              <a:rPr lang="en-US" sz="1100" b="1" dirty="0">
+                <a:solidFill>
+                  <a:srgbClr val="1B3A5C"/>
+                </a:solidFill>
+                <a:latin typeface="Microsoft YaHei" pitchFamily="34" charset="0"/>
+                <a:ea typeface="Microsoft YaHei" pitchFamily="34" charset="-122"/>
+                <a:cs typeface="Microsoft YaHei" pitchFamily="34" charset="-120"/>
+              </a:rPr>
+              <a:t>智能公文辅助</a:t>
+            </a:r>
+            <a:endParaRPr lang="en-US" sz="1100" dirty="0"/>
+          </a:p>
+        </p:txBody>
+      </p:sp>
+      <p:sp>
+        <p:nvSpPr>
+          <p:cNvPr id="27" name="Text 25"/>
+          <p:cNvSpPr/>
+          <p:nvPr/>
+        </p:nvSpPr>
+        <p:spPr>
+          <a:xfrm>
+            <a:off x="4937760" y="2679192"/>
+            <a:ext cx="3749040" cy="365760"/>
+          </a:xfrm>
+          <a:prstGeom prst="rect">
+            <a:avLst/>
+          </a:prstGeom>
+          <a:noFill/>
+          <a:ln/>
+        </p:spPr>
+        <p:txBody>
+          <a:bodyPr wrap="square" rtlCol="0" anchor="t"/>
+          <a:lstStyle/>
+          <a:p>
+            <a:pPr indent="0" marL="0">
+              <a:buNone/>
+            </a:pPr>
+            <a:r>
+              <a:rPr lang="en-US" sz="900" dirty="0">
+                <a:solidFill>
+                  <a:srgbClr val="444466"/>
+                </a:solidFill>
+                <a:latin typeface="Microsoft YaHei" pitchFamily="34" charset="0"/>
+                <a:ea typeface="Microsoft YaHei" pitchFamily="34" charset="-122"/>
+                <a:cs typeface="Microsoft YaHei" pitchFamily="34" charset="-120"/>
+              </a:rPr>
+              <a:t>浙江“政务大脑”自动生成初稿，公文起草效率提升70%</a:t>
+            </a:r>
+            <a:endParaRPr lang="en-US" sz="900" dirty="0"/>
+          </a:p>
+        </p:txBody>
+      </p:sp>
+      <p:sp>
+        <p:nvSpPr>
+          <p:cNvPr id="28" name="Text 26"/>
+          <p:cNvSpPr/>
+          <p:nvPr/>
+        </p:nvSpPr>
+        <p:spPr>
+          <a:xfrm>
+            <a:off x="4937760" y="3163824"/>
+            <a:ext cx="3749040" cy="228600"/>
+          </a:xfrm>
+          <a:prstGeom prst="rect">
+            <a:avLst/>
+          </a:prstGeom>
+          <a:noFill/>
+          <a:ln/>
+        </p:spPr>
+        <p:txBody>
+          <a:bodyPr wrap="square" rtlCol="0" anchor="ctr"/>
+          <a:lstStyle/>
+          <a:p>
+            <a:pPr indent="0" marL="0">
+              <a:buNone/>
+            </a:pPr>
+            <a:r>
+              <a:rPr lang="en-US" sz="1100" b="1" dirty="0">
+                <a:solidFill>
+                  <a:srgbClr val="1B3A5C"/>
+                </a:solidFill>
+                <a:latin typeface="Microsoft YaHei" pitchFamily="34" charset="0"/>
+                <a:ea typeface="Microsoft YaHei" pitchFamily="34" charset="-122"/>
+                <a:cs typeface="Microsoft YaHei" pitchFamily="34" charset="-120"/>
+              </a:rPr>
+              <a:t>AI网格巡查</a:t>
+            </a:r>
+            <a:endParaRPr lang="en-US" sz="1100" dirty="0"/>
+          </a:p>
+        </p:txBody>
+      </p:sp>
+      <p:sp>
+        <p:nvSpPr>
+          <p:cNvPr id="29" name="Text 27"/>
+          <p:cNvSpPr/>
+          <p:nvPr/>
+        </p:nvSpPr>
+        <p:spPr>
+          <a:xfrm>
+            <a:off x="4937760" y="3392424"/>
+            <a:ext cx="3749040" cy="365760"/>
+          </a:xfrm>
+          <a:prstGeom prst="rect">
+            <a:avLst/>
+          </a:prstGeom>
+          <a:noFill/>
+          <a:ln/>
+        </p:spPr>
+        <p:txBody>
+          <a:bodyPr wrap="square" rtlCol="0" anchor="t"/>
+          <a:lstStyle/>
+          <a:p>
+            <a:pPr indent="0" marL="0">
+              <a:buNone/>
+            </a:pPr>
+            <a:r>
+              <a:rPr lang="en-US" sz="900" dirty="0">
+                <a:solidFill>
+                  <a:srgbClr val="444466"/>
+                </a:solidFill>
+                <a:latin typeface="Microsoft YaHei" pitchFamily="34" charset="0"/>
+                <a:ea typeface="Microsoft YaHei" pitchFamily="34" charset="-122"/>
+                <a:cs typeface="Microsoft YaHei" pitchFamily="34" charset="-120"/>
+              </a:rPr>
+              <a:t>北京AI识别违建/垃圾堆积，准确率92%，巡查效率提升5倍</a:t>
+            </a:r>
+            <a:endParaRPr lang="en-US" sz="900" dirty="0"/>
+          </a:p>
+        </p:txBody>
+      </p:sp>
+      <p:sp>
+        <p:nvSpPr>
+          <p:cNvPr id="30" name="Text 28"/>
+          <p:cNvSpPr/>
+          <p:nvPr/>
+        </p:nvSpPr>
+        <p:spPr>
+          <a:xfrm>
+            <a:off x="4937760" y="3877056"/>
+            <a:ext cx="3749040" cy="228600"/>
+          </a:xfrm>
+          <a:prstGeom prst="rect">
+            <a:avLst/>
+          </a:prstGeom>
+          <a:noFill/>
+          <a:ln/>
+        </p:spPr>
+        <p:txBody>
+          <a:bodyPr wrap="square" rtlCol="0" anchor="ctr"/>
+          <a:lstStyle/>
+          <a:p>
+            <a:pPr indent="0" marL="0">
+              <a:buNone/>
+            </a:pPr>
+            <a:r>
+              <a:rPr lang="en-US" sz="1100" b="1" dirty="0">
+                <a:solidFill>
+                  <a:srgbClr val="1B3A5C"/>
+                </a:solidFill>
+                <a:latin typeface="Microsoft YaHei" pitchFamily="34" charset="0"/>
+                <a:ea typeface="Microsoft YaHei" pitchFamily="34" charset="-122"/>
+                <a:cs typeface="Microsoft YaHei" pitchFamily="34" charset="-120"/>
+              </a:rPr>
+              <a:t>热线智能分析</a:t>
+            </a:r>
+            <a:endParaRPr lang="en-US" sz="1100" dirty="0"/>
+          </a:p>
+        </p:txBody>
+      </p:sp>
+      <p:sp>
+        <p:nvSpPr>
+          <p:cNvPr id="31" name="Text 29"/>
+          <p:cNvSpPr/>
+          <p:nvPr/>
+        </p:nvSpPr>
+        <p:spPr>
+          <a:xfrm>
+            <a:off x="4937760" y="4105656"/>
+            <a:ext cx="3749040" cy="365760"/>
+          </a:xfrm>
+          <a:prstGeom prst="rect">
+            <a:avLst/>
+          </a:prstGeom>
+          <a:noFill/>
+          <a:ln/>
+        </p:spPr>
+        <p:txBody>
+          <a:bodyPr wrap="square" rtlCol="0" anchor="t"/>
+          <a:lstStyle/>
+          <a:p>
+            <a:pPr indent="0" marL="0">
+              <a:buNone/>
+            </a:pPr>
+            <a:r>
+              <a:rPr lang="en-US" sz="900" dirty="0">
+                <a:solidFill>
+                  <a:srgbClr val="444466"/>
+                </a:solidFill>
+                <a:latin typeface="Microsoft YaHei" pitchFamily="34" charset="0"/>
+                <a:ea typeface="Microsoft YaHei" pitchFamily="34" charset="-122"/>
+                <a:cs typeface="Microsoft YaHei" pitchFamily="34" charset="-120"/>
+              </a:rPr>
+              <a:t>上海12345接入AI，热点问题自动聚类预警，提前发现群体性诉求</a:t>
+            </a:r>
+            <a:endParaRPr lang="en-US" sz="900" dirty="0"/>
+          </a:p>
+        </p:txBody>
+      </p:sp>
+    </p:spTree>
+  </p:cSld>
+  <p:clrMapOvr>
+    <a:masterClrMapping/>
+  </p:clrMapOvr>
+</p:sld>
+</file>
+
+<file path=ppt/slides/slide27.xml><?xml version="1.0" encoding="utf-8"?>
+<p:sld xmlns:a="http://schemas.openxmlformats.org/drawingml/2006/main" xmlns:r="http://schemas.openxmlformats.org/officeDocument/2006/relationships" xmlns:p="http://schemas.openxmlformats.org/presentationml/2006/main">
+  <p:cSld name="Slide 2">
+    <p:bg>
+      <p:bgPr>
+        <a:solidFill>
+          <a:srgbClr val="F5F7FA"/>
+        </a:solidFill>
+      </p:bgPr>
+    </p:bg>
+    <p:spTree>
+      <p:nvGrpSpPr>
+        <p:cNvPr id="1" name=""/>
+        <p:cNvGrpSpPr/>
+        <p:nvPr/>
+      </p:nvGrpSpPr>
+      <p:grpSpPr>
+        <a:xfrm>
+          <a:off x="0" y="0"/>
+          <a:ext cx="0" cy="0"/>
+          <a:chOff x="0" y="0"/>
+          <a:chExt cx="0" cy="0"/>
+        </a:xfrm>
+      </p:grpSpPr>
+      <p:sp>
+        <p:nvSpPr>
+          <p:cNvPr id="2" name="Shape 0"/>
+          <p:cNvSpPr/>
+          <p:nvPr/>
+        </p:nvSpPr>
+        <p:spPr>
+          <a:xfrm>
+            <a:off x="0" y="0"/>
+            <a:ext cx="9144000" cy="822960"/>
+          </a:xfrm>
+          <a:prstGeom prst="rect">
+            <a:avLst/>
+          </a:prstGeom>
+          <a:solidFill>
+            <a:srgbClr val="1B3A5C"/>
+          </a:solidFill>
+          <a:ln/>
+        </p:spPr>
+      </p:sp>
+      <p:sp>
+        <p:nvSpPr>
+          <p:cNvPr id="3" name="Text 1"/>
+          <p:cNvSpPr/>
+          <p:nvPr/>
+        </p:nvSpPr>
+        <p:spPr>
+          <a:xfrm>
+            <a:off x="365760" y="109728"/>
+            <a:ext cx="457200" cy="594360"/>
+          </a:xfrm>
+          <a:prstGeom prst="rect">
+            <a:avLst/>
+          </a:prstGeom>
+          <a:noFill/>
+          <a:ln/>
+        </p:spPr>
+        <p:txBody>
+          <a:bodyPr wrap="square" rtlCol="0" anchor="ctr"/>
+          <a:lstStyle/>
+          <a:p>
+            <a:pPr algn="ctr" indent="0" marL="0">
+              <a:buNone/>
+            </a:pPr>
+            <a:r>
+              <a:rPr lang="en-US" sz="2000" b="1" dirty="0">
+                <a:solidFill>
+                  <a:srgbClr val="C99A2A"/>
+                </a:solidFill>
+                <a:latin typeface="Georgia" pitchFamily="34" charset="0"/>
+                <a:ea typeface="Georgia" pitchFamily="34" charset="-122"/>
+                <a:cs typeface="Georgia" pitchFamily="34" charset="-120"/>
+              </a:rPr>
+              <a:t>13</a:t>
+            </a:r>
+            <a:endParaRPr lang="en-US" sz="2000" dirty="0"/>
+          </a:p>
+        </p:txBody>
+      </p:sp>
+      <p:sp>
+        <p:nvSpPr>
+          <p:cNvPr id="4" name="Text 2"/>
+          <p:cNvSpPr/>
+          <p:nvPr/>
+        </p:nvSpPr>
+        <p:spPr>
+          <a:xfrm>
+            <a:off x="868680" y="109728"/>
+            <a:ext cx="7772400" cy="594360"/>
+          </a:xfrm>
+          <a:prstGeom prst="rect">
+            <a:avLst/>
+          </a:prstGeom>
+          <a:noFill/>
+          <a:ln/>
+        </p:spPr>
+        <p:txBody>
+          <a:bodyPr wrap="square" rtlCol="0" anchor="ctr"/>
+          <a:lstStyle/>
+          <a:p>
+            <a:pPr indent="0" marL="0">
+              <a:buNone/>
+            </a:pPr>
+            <a:r>
+              <a:rPr lang="en-US" sz="2000" b="1" dirty="0">
+                <a:solidFill>
+                  <a:srgbClr val="FFFFFF"/>
+                </a:solidFill>
+                <a:latin typeface="Georgia" pitchFamily="34" charset="0"/>
+                <a:ea typeface="Georgia" pitchFamily="34" charset="-122"/>
+                <a:cs typeface="Georgia" pitchFamily="34" charset="-120"/>
+              </a:rPr>
+              <a:t>政务大模型：从通用AI到政务专属智能</a:t>
+            </a:r>
+            <a:endParaRPr lang="en-US" sz="2000" dirty="0"/>
+          </a:p>
+        </p:txBody>
+      </p:sp>
+      <p:sp>
+        <p:nvSpPr>
+          <p:cNvPr id="5" name="Shape 3"/>
+          <p:cNvSpPr/>
+          <p:nvPr/>
+        </p:nvSpPr>
+        <p:spPr>
+          <a:xfrm>
+            <a:off x="0" y="822960"/>
+            <a:ext cx="9144000" cy="27432"/>
+          </a:xfrm>
+          <a:prstGeom prst="rect">
+            <a:avLst/>
+          </a:prstGeom>
+          <a:solidFill>
+            <a:srgbClr val="C99A2A"/>
+          </a:solidFill>
+          <a:ln/>
+        </p:spPr>
+      </p:sp>
+      <p:sp>
+        <p:nvSpPr>
+          <p:cNvPr id="6" name="Text 4"/>
+          <p:cNvSpPr/>
+          <p:nvPr/>
+        </p:nvSpPr>
+        <p:spPr>
+          <a:xfrm>
+            <a:off x="8229600" y="4800600"/>
+            <a:ext cx="640080" cy="274320"/>
+          </a:xfrm>
+          <a:prstGeom prst="rect">
+            <a:avLst/>
+          </a:prstGeom>
+          <a:noFill/>
+          <a:ln/>
+        </p:spPr>
+        <p:txBody>
+          <a:bodyPr wrap="square" rtlCol="0" anchor="ctr"/>
+          <a:lstStyle/>
+          <a:p>
+            <a:pPr algn="r" indent="0" marL="0">
+              <a:buNone/>
+            </a:pPr>
+            <a:r>
+              <a:rPr lang="en-US" sz="900" dirty="0">
+                <a:solidFill>
+                  <a:srgbClr val="888899"/>
+                </a:solidFill>
+                <a:latin typeface="Georgia" pitchFamily="34" charset="0"/>
+                <a:ea typeface="Georgia" pitchFamily="34" charset="-122"/>
+                <a:cs typeface="Georgia" pitchFamily="34" charset="-120"/>
+              </a:rPr>
+              <a:t>14</a:t>
+            </a:r>
+            <a:endParaRPr lang="en-US" sz="900" dirty="0"/>
+          </a:p>
+        </p:txBody>
+      </p:sp>
+      <p:sp>
+        <p:nvSpPr>
+          <p:cNvPr id="7" name="Shape 5"/>
+          <p:cNvSpPr/>
+          <p:nvPr/>
+        </p:nvSpPr>
+        <p:spPr>
+          <a:xfrm>
+            <a:off x="365760" y="1097280"/>
+            <a:ext cx="4114800" cy="3474720"/>
+          </a:xfrm>
+          <a:prstGeom prst="rect">
+            <a:avLst/>
+          </a:prstGeom>
+          <a:solidFill>
+            <a:srgbClr val="FFFFFF"/>
+          </a:solidFill>
+          <a:ln/>
+          <a:effectLst>
+            <a:outerShdw sx="100000" sy="100000" kx="0" ky="0" algn="bl" rotWithShape="0" blurRad="101600" dist="25400" dir="8100000">
+              <a:srgbClr val="000000">
+                <a:alpha val="10000"/>
+              </a:srgbClr>
+            </a:outerShdw>
+          </a:effectLst>
+        </p:spPr>
+      </p:sp>
+      <p:sp>
+        <p:nvSpPr>
+          <p:cNvPr id="8" name="Shape 6"/>
+          <p:cNvSpPr/>
+          <p:nvPr/>
+        </p:nvSpPr>
+        <p:spPr>
+          <a:xfrm>
+            <a:off x="365760" y="1097280"/>
+            <a:ext cx="4114800" cy="457200"/>
+          </a:xfrm>
+          <a:prstGeom prst="rect">
+            <a:avLst/>
+          </a:prstGeom>
+          <a:solidFill>
+            <a:srgbClr val="1B3A5C"/>
+          </a:solidFill>
+          <a:ln/>
+        </p:spPr>
+      </p:sp>
+      <p:sp>
+        <p:nvSpPr>
+          <p:cNvPr id="9" name="Text 7"/>
+          <p:cNvSpPr/>
+          <p:nvPr/>
+        </p:nvSpPr>
+        <p:spPr>
+          <a:xfrm>
+            <a:off x="548640" y="1143000"/>
+            <a:ext cx="3657600" cy="365760"/>
+          </a:xfrm>
+          <a:prstGeom prst="rect">
+            <a:avLst/>
+          </a:prstGeom>
+          <a:noFill/>
+          <a:ln/>
+        </p:spPr>
+        <p:txBody>
+          <a:bodyPr wrap="square" rtlCol="0" anchor="ctr"/>
+          <a:lstStyle/>
+          <a:p>
+            <a:pPr indent="0" marL="0">
+              <a:buNone/>
+            </a:pPr>
+            <a:r>
+              <a:rPr lang="en-US" sz="1300" b="1" dirty="0">
+                <a:solidFill>
+                  <a:srgbClr val="FFFFFF"/>
+                </a:solidFill>
+                <a:latin typeface="Georgia" pitchFamily="34" charset="0"/>
+                <a:ea typeface="Georgia" pitchFamily="34" charset="-122"/>
+                <a:cs typeface="Georgia" pitchFamily="34" charset="-120"/>
+              </a:rPr>
+              <a:t>中国政务大模型发展进程</a:t>
+            </a:r>
+            <a:endParaRPr lang="en-US" sz="1300" dirty="0"/>
+          </a:p>
+        </p:txBody>
+      </p:sp>
+      <p:sp>
+        <p:nvSpPr>
+          <p:cNvPr id="10" name="Shape 8"/>
+          <p:cNvSpPr/>
+          <p:nvPr/>
+        </p:nvSpPr>
+        <p:spPr>
+          <a:xfrm>
+            <a:off x="640080" y="1737360"/>
+            <a:ext cx="365760" cy="365760"/>
+          </a:xfrm>
+          <a:prstGeom prst="ellipse">
+            <a:avLst/>
+          </a:prstGeom>
+          <a:solidFill>
+            <a:srgbClr val="2C5F8A"/>
+          </a:solidFill>
+          <a:ln/>
+        </p:spPr>
+      </p:sp>
+      <p:sp>
+        <p:nvSpPr>
+          <p:cNvPr id="11" name="Text 9"/>
+          <p:cNvSpPr/>
+          <p:nvPr/>
+        </p:nvSpPr>
+        <p:spPr>
+          <a:xfrm>
+            <a:off x="640080" y="1737360"/>
+            <a:ext cx="365760" cy="365760"/>
+          </a:xfrm>
+          <a:prstGeom prst="rect">
+            <a:avLst/>
+          </a:prstGeom>
+          <a:noFill/>
+          <a:ln/>
+        </p:spPr>
+        <p:txBody>
+          <a:bodyPr wrap="square" rtlCol="0" anchor="ctr"/>
+          <a:lstStyle/>
+          <a:p>
+            <a:pPr algn="ctr" indent="0" marL="0">
+              <a:buNone/>
+            </a:pPr>
+            <a:r>
+              <a:rPr lang="en-US" sz="800" b="1" dirty="0">
+                <a:solidFill>
+                  <a:srgbClr val="FFFFFF"/>
+                </a:solidFill>
+                <a:latin typeface="Georgia" pitchFamily="34" charset="0"/>
+                <a:ea typeface="Georgia" pitchFamily="34" charset="-122"/>
+                <a:cs typeface="Georgia" pitchFamily="34" charset="-120"/>
+              </a:rPr>
+              <a:t>2023</a:t>
+            </a:r>
+            <a:endParaRPr lang="en-US" sz="800" dirty="0"/>
+          </a:p>
+        </p:txBody>
+      </p:sp>
+      <p:sp>
+        <p:nvSpPr>
+          <p:cNvPr id="12" name="Text 10"/>
+          <p:cNvSpPr/>
+          <p:nvPr/>
+        </p:nvSpPr>
+        <p:spPr>
+          <a:xfrm>
+            <a:off x="1188720" y="1691640"/>
+            <a:ext cx="3108960" cy="457200"/>
+          </a:xfrm>
+          <a:prstGeom prst="rect">
+            <a:avLst/>
+          </a:prstGeom>
+          <a:noFill/>
+          <a:ln/>
+        </p:spPr>
+        <p:txBody>
+          <a:bodyPr wrap="square" rtlCol="0" anchor="t"/>
+          <a:lstStyle/>
+          <a:p>
+            <a:pPr indent="0" marL="0">
+              <a:buNone/>
+            </a:pPr>
+            <a:r>
+              <a:rPr lang="en-US" sz="900" dirty="0">
+                <a:solidFill>
+                  <a:srgbClr val="444466"/>
+                </a:solidFill>
+                <a:latin typeface="Microsoft YaHei" pitchFamily="34" charset="0"/>
+                <a:ea typeface="Microsoft YaHei" pitchFamily="34" charset="-122"/>
+                <a:cs typeface="Microsoft YaHei" pitchFamily="34" charset="-120"/>
+              </a:rPr>
+              <a:t>GPT引发政务AI热潮，各地方政府开始研究大模型在政务场景的应用可能</a:t>
+            </a:r>
+            <a:endParaRPr lang="en-US" sz="900" dirty="0"/>
+          </a:p>
+        </p:txBody>
+      </p:sp>
+      <p:sp>
+        <p:nvSpPr>
+          <p:cNvPr id="13" name="Shape 11"/>
+          <p:cNvSpPr/>
+          <p:nvPr/>
+        </p:nvSpPr>
+        <p:spPr>
+          <a:xfrm>
+            <a:off x="640080" y="2450592"/>
+            <a:ext cx="365760" cy="365760"/>
+          </a:xfrm>
+          <a:prstGeom prst="ellipse">
+            <a:avLst/>
+          </a:prstGeom>
+          <a:solidFill>
+            <a:srgbClr val="2C5F8A"/>
+          </a:solidFill>
+          <a:ln/>
+        </p:spPr>
+      </p:sp>
+      <p:sp>
+        <p:nvSpPr>
+          <p:cNvPr id="14" name="Text 12"/>
+          <p:cNvSpPr/>
+          <p:nvPr/>
+        </p:nvSpPr>
+        <p:spPr>
+          <a:xfrm>
+            <a:off x="640080" y="2450592"/>
+            <a:ext cx="365760" cy="365760"/>
+          </a:xfrm>
+          <a:prstGeom prst="rect">
+            <a:avLst/>
+          </a:prstGeom>
+          <a:noFill/>
+          <a:ln/>
+        </p:spPr>
+        <p:txBody>
+          <a:bodyPr wrap="square" rtlCol="0" anchor="ctr"/>
+          <a:lstStyle/>
+          <a:p>
+            <a:pPr algn="ctr" indent="0" marL="0">
+              <a:buNone/>
+            </a:pPr>
+            <a:r>
+              <a:rPr lang="en-US" sz="800" b="1" dirty="0">
+                <a:solidFill>
+                  <a:srgbClr val="FFFFFF"/>
+                </a:solidFill>
+                <a:latin typeface="Georgia" pitchFamily="34" charset="0"/>
+                <a:ea typeface="Georgia" pitchFamily="34" charset="-122"/>
+                <a:cs typeface="Georgia" pitchFamily="34" charset="-120"/>
+              </a:rPr>
+              <a:t>2024</a:t>
+            </a:r>
+            <a:endParaRPr lang="en-US" sz="800" dirty="0"/>
+          </a:p>
+        </p:txBody>
+      </p:sp>
+      <p:sp>
+        <p:nvSpPr>
+          <p:cNvPr id="15" name="Text 13"/>
+          <p:cNvSpPr/>
+          <p:nvPr/>
+        </p:nvSpPr>
+        <p:spPr>
+          <a:xfrm>
+            <a:off x="1188720" y="2404872"/>
+            <a:ext cx="3108960" cy="457200"/>
+          </a:xfrm>
+          <a:prstGeom prst="rect">
+            <a:avLst/>
+          </a:prstGeom>
+          <a:noFill/>
+          <a:ln/>
+        </p:spPr>
+        <p:txBody>
+          <a:bodyPr wrap="square" rtlCol="0" anchor="t"/>
+          <a:lstStyle/>
+          <a:p>
+            <a:pPr indent="0" marL="0">
+              <a:buNone/>
+            </a:pPr>
+            <a:r>
+              <a:rPr lang="en-US" sz="900" dirty="0">
+                <a:solidFill>
+                  <a:srgbClr val="444466"/>
+                </a:solidFill>
+                <a:latin typeface="Microsoft YaHei" pitchFamily="34" charset="0"/>
+                <a:ea typeface="Microsoft YaHei" pitchFamily="34" charset="-122"/>
+                <a:cs typeface="Microsoft YaHei" pitchFamily="34" charset="-120"/>
+              </a:rPr>
+              <a:t>首批政务大模型上线：深圳“深政助手”、北京“京策”、浙江“浙政智脑”</a:t>
+            </a:r>
+            <a:endParaRPr lang="en-US" sz="900" dirty="0"/>
+          </a:p>
+        </p:txBody>
+      </p:sp>
+      <p:sp>
+        <p:nvSpPr>
+          <p:cNvPr id="16" name="Shape 14"/>
+          <p:cNvSpPr/>
+          <p:nvPr/>
+        </p:nvSpPr>
+        <p:spPr>
+          <a:xfrm>
+            <a:off x="640080" y="3163824"/>
+            <a:ext cx="365760" cy="365760"/>
+          </a:xfrm>
+          <a:prstGeom prst="ellipse">
+            <a:avLst/>
+          </a:prstGeom>
+          <a:solidFill>
+            <a:srgbClr val="1B3A5C"/>
+          </a:solidFill>
+          <a:ln/>
+        </p:spPr>
+      </p:sp>
+      <p:sp>
+        <p:nvSpPr>
+          <p:cNvPr id="17" name="Text 15"/>
+          <p:cNvSpPr/>
+          <p:nvPr/>
+        </p:nvSpPr>
+        <p:spPr>
+          <a:xfrm>
+            <a:off x="640080" y="3163824"/>
+            <a:ext cx="365760" cy="365760"/>
+          </a:xfrm>
+          <a:prstGeom prst="rect">
+            <a:avLst/>
+          </a:prstGeom>
+          <a:noFill/>
+          <a:ln/>
+        </p:spPr>
+        <p:txBody>
+          <a:bodyPr wrap="square" rtlCol="0" anchor="ctr"/>
+          <a:lstStyle/>
+          <a:p>
+            <a:pPr algn="ctr" indent="0" marL="0">
+              <a:buNone/>
+            </a:pPr>
+            <a:r>
+              <a:rPr lang="en-US" sz="800" b="1" dirty="0">
+                <a:solidFill>
+                  <a:srgbClr val="FFFFFF"/>
+                </a:solidFill>
+                <a:latin typeface="Georgia" pitchFamily="34" charset="0"/>
+                <a:ea typeface="Georgia" pitchFamily="34" charset="-122"/>
+                <a:cs typeface="Georgia" pitchFamily="34" charset="-120"/>
+              </a:rPr>
+              <a:t>2025</a:t>
+            </a:r>
+            <a:endParaRPr lang="en-US" sz="800" dirty="0"/>
+          </a:p>
+        </p:txBody>
+      </p:sp>
+      <p:sp>
+        <p:nvSpPr>
+          <p:cNvPr id="18" name="Text 16"/>
+          <p:cNvSpPr/>
+          <p:nvPr/>
+        </p:nvSpPr>
+        <p:spPr>
+          <a:xfrm>
+            <a:off x="1188720" y="3118104"/>
+            <a:ext cx="3108960" cy="457200"/>
+          </a:xfrm>
+          <a:prstGeom prst="rect">
+            <a:avLst/>
+          </a:prstGeom>
+          <a:noFill/>
+          <a:ln/>
+        </p:spPr>
+        <p:txBody>
+          <a:bodyPr wrap="square" rtlCol="0" anchor="t"/>
+          <a:lstStyle/>
+          <a:p>
+            <a:pPr indent="0" marL="0">
+              <a:buNone/>
+            </a:pPr>
+            <a:r>
+              <a:rPr lang="en-US" sz="900" dirty="0">
+                <a:solidFill>
+                  <a:srgbClr val="444466"/>
+                </a:solidFill>
+                <a:latin typeface="Microsoft YaHei" pitchFamily="34" charset="0"/>
+                <a:ea typeface="Microsoft YaHei" pitchFamily="34" charset="-122"/>
+                <a:cs typeface="Microsoft YaHei" pitchFamily="34" charset="-120"/>
+              </a:rPr>
+              <a:t>政务大模型全面铺开，三分之二以上省份已启动政务AI试点</a:t>
+            </a:r>
+            <a:endParaRPr lang="en-US" sz="900" dirty="0"/>
+          </a:p>
+        </p:txBody>
+      </p:sp>
+      <p:sp>
+        <p:nvSpPr>
+          <p:cNvPr id="19" name="Shape 17"/>
+          <p:cNvSpPr/>
+          <p:nvPr/>
+        </p:nvSpPr>
+        <p:spPr>
+          <a:xfrm>
+            <a:off x="640080" y="3877056"/>
+            <a:ext cx="365760" cy="365760"/>
+          </a:xfrm>
+          <a:prstGeom prst="ellipse">
+            <a:avLst/>
+          </a:prstGeom>
+          <a:solidFill>
+            <a:srgbClr val="1B3A5C"/>
+          </a:solidFill>
+          <a:ln/>
+        </p:spPr>
+      </p:sp>
+      <p:sp>
+        <p:nvSpPr>
+          <p:cNvPr id="20" name="Text 18"/>
+          <p:cNvSpPr/>
+          <p:nvPr/>
+        </p:nvSpPr>
+        <p:spPr>
+          <a:xfrm>
+            <a:off x="640080" y="3877056"/>
+            <a:ext cx="365760" cy="365760"/>
+          </a:xfrm>
+          <a:prstGeom prst="rect">
+            <a:avLst/>
+          </a:prstGeom>
+          <a:noFill/>
+          <a:ln/>
+        </p:spPr>
+        <p:txBody>
+          <a:bodyPr wrap="square" rtlCol="0" anchor="ctr"/>
+          <a:lstStyle/>
+          <a:p>
+            <a:pPr algn="ctr" indent="0" marL="0">
+              <a:buNone/>
+            </a:pPr>
+            <a:r>
+              <a:rPr lang="en-US" sz="800" b="1" dirty="0">
+                <a:solidFill>
+                  <a:srgbClr val="FFFFFF"/>
+                </a:solidFill>
+                <a:latin typeface="Georgia" pitchFamily="34" charset="0"/>
+                <a:ea typeface="Georgia" pitchFamily="34" charset="-122"/>
+                <a:cs typeface="Georgia" pitchFamily="34" charset="-120"/>
+              </a:rPr>
+              <a:t>2026</a:t>
+            </a:r>
+            <a:endParaRPr lang="en-US" sz="800" dirty="0"/>
+          </a:p>
+        </p:txBody>
+      </p:sp>
+      <p:sp>
+        <p:nvSpPr>
+          <p:cNvPr id="21" name="Text 19"/>
+          <p:cNvSpPr/>
+          <p:nvPr/>
+        </p:nvSpPr>
+        <p:spPr>
+          <a:xfrm>
+            <a:off x="1188720" y="3831336"/>
+            <a:ext cx="3108960" cy="457200"/>
+          </a:xfrm>
+          <a:prstGeom prst="rect">
+            <a:avLst/>
+          </a:prstGeom>
+          <a:noFill/>
+          <a:ln/>
+        </p:spPr>
+        <p:txBody>
+          <a:bodyPr wrap="square" rtlCol="0" anchor="t"/>
+          <a:lstStyle/>
+          <a:p>
+            <a:pPr indent="0" marL="0">
+              <a:buNone/>
+            </a:pPr>
+            <a:r>
+              <a:rPr lang="en-US" sz="900" dirty="0">
+                <a:solidFill>
+                  <a:srgbClr val="444466"/>
+                </a:solidFill>
+                <a:latin typeface="Microsoft YaHei" pitchFamily="34" charset="0"/>
+                <a:ea typeface="Microsoft YaHei" pitchFamily="34" charset="-122"/>
+                <a:cs typeface="Microsoft YaHei" pitchFamily="34" charset="-120"/>
+              </a:rPr>
+              <a:t>多省市将AI纳入日常政务流程，从“试点”走向“常态”</a:t>
+            </a:r>
+            <a:endParaRPr lang="en-US" sz="900" dirty="0"/>
+          </a:p>
+        </p:txBody>
+      </p:sp>
+      <p:sp>
+        <p:nvSpPr>
+          <p:cNvPr id="22" name="Shape 20"/>
+          <p:cNvSpPr/>
+          <p:nvPr/>
+        </p:nvSpPr>
+        <p:spPr>
+          <a:xfrm>
+            <a:off x="4663440" y="1097280"/>
+            <a:ext cx="4206240" cy="3474720"/>
+          </a:xfrm>
+          <a:prstGeom prst="rect">
+            <a:avLst/>
+          </a:prstGeom>
+          <a:solidFill>
+            <a:srgbClr val="FFFFFF"/>
+          </a:solidFill>
+          <a:ln/>
+          <a:effectLst>
+            <a:outerShdw sx="100000" sy="100000" kx="0" ky="0" algn="bl" rotWithShape="0" blurRad="101600" dist="25400" dir="8100000">
+              <a:srgbClr val="000000">
+                <a:alpha val="10000"/>
+              </a:srgbClr>
+            </a:outerShdw>
+          </a:effectLst>
+        </p:spPr>
+      </p:sp>
+      <p:sp>
+        <p:nvSpPr>
+          <p:cNvPr id="23" name="Shape 21"/>
+          <p:cNvSpPr/>
+          <p:nvPr/>
+        </p:nvSpPr>
+        <p:spPr>
+          <a:xfrm>
+            <a:off x="4663440" y="1097280"/>
+            <a:ext cx="4206240" cy="457200"/>
+          </a:xfrm>
+          <a:prstGeom prst="rect">
+            <a:avLst/>
+          </a:prstGeom>
+          <a:solidFill>
+            <a:srgbClr val="C99A2A"/>
+          </a:solidFill>
+          <a:ln/>
+        </p:spPr>
+      </p:sp>
+      <p:sp>
+        <p:nvSpPr>
+          <p:cNvPr id="24" name="Text 22"/>
+          <p:cNvSpPr/>
+          <p:nvPr/>
+        </p:nvSpPr>
+        <p:spPr>
+          <a:xfrm>
+            <a:off x="4846320" y="1143000"/>
+            <a:ext cx="3657600" cy="365760"/>
+          </a:xfrm>
+          <a:prstGeom prst="rect">
+            <a:avLst/>
+          </a:prstGeom>
+          <a:noFill/>
+          <a:ln/>
+        </p:spPr>
+        <p:txBody>
+          <a:bodyPr wrap="square" rtlCol="0" anchor="ctr"/>
+          <a:lstStyle/>
+          <a:p>
+            <a:pPr indent="0" marL="0">
+              <a:buNone/>
+            </a:pPr>
+            <a:r>
+              <a:rPr lang="en-US" sz="1300" b="1" dirty="0">
+                <a:solidFill>
+                  <a:srgbClr val="FFFFFF"/>
+                </a:solidFill>
+                <a:latin typeface="Georgia" pitchFamily="34" charset="0"/>
+                <a:ea typeface="Georgia" pitchFamily="34" charset="-122"/>
+                <a:cs typeface="Georgia" pitchFamily="34" charset="-120"/>
+              </a:rPr>
+              <a:t>政务大模型核心能力</a:t>
+            </a:r>
+            <a:endParaRPr lang="en-US" sz="1300" dirty="0"/>
+          </a:p>
+        </p:txBody>
+      </p:sp>
+      <p:sp>
+        <p:nvSpPr>
+          <p:cNvPr id="25" name="Shape 23"/>
+          <p:cNvSpPr/>
+          <p:nvPr/>
+        </p:nvSpPr>
+        <p:spPr>
+          <a:xfrm>
+            <a:off x="4846320" y="1691640"/>
+            <a:ext cx="54864" cy="320040"/>
+          </a:xfrm>
+          <a:prstGeom prst="rect">
+            <a:avLst/>
+          </a:prstGeom>
+          <a:solidFill>
+            <a:srgbClr val="1B3A5C"/>
+          </a:solidFill>
+          <a:ln/>
+        </p:spPr>
+      </p:sp>
+      <p:sp>
+        <p:nvSpPr>
+          <p:cNvPr id="26" name="Text 24"/>
+          <p:cNvSpPr/>
+          <p:nvPr/>
+        </p:nvSpPr>
+        <p:spPr>
+          <a:xfrm>
+            <a:off x="5074920" y="1673352"/>
+            <a:ext cx="1188720" cy="320040"/>
+          </a:xfrm>
+          <a:prstGeom prst="rect">
+            <a:avLst/>
+          </a:prstGeom>
+          <a:noFill/>
+          <a:ln/>
+        </p:spPr>
+        <p:txBody>
+          <a:bodyPr wrap="square" rtlCol="0" anchor="ctr"/>
+          <a:lstStyle/>
+          <a:p>
+            <a:pPr indent="0" marL="0">
+              <a:buNone/>
+            </a:pPr>
+            <a:r>
+              <a:rPr lang="en-US" sz="1000" b="1" dirty="0">
+                <a:solidFill>
+                  <a:srgbClr val="1B3A5C"/>
+                </a:solidFill>
+                <a:latin typeface="Microsoft YaHei" pitchFamily="34" charset="0"/>
+                <a:ea typeface="Microsoft YaHei" pitchFamily="34" charset="-122"/>
+                <a:cs typeface="Microsoft YaHei" pitchFamily="34" charset="-120"/>
+              </a:rPr>
+              <a:t>政策解读</a:t>
+            </a:r>
+            <a:endParaRPr lang="en-US" sz="1000" dirty="0"/>
+          </a:p>
+        </p:txBody>
+      </p:sp>
+      <p:sp>
+        <p:nvSpPr>
+          <p:cNvPr id="27" name="Text 25"/>
+          <p:cNvSpPr/>
+          <p:nvPr/>
+        </p:nvSpPr>
+        <p:spPr>
+          <a:xfrm>
+            <a:off x="6217920" y="1673352"/>
+            <a:ext cx="2468880" cy="320040"/>
+          </a:xfrm>
+          <a:prstGeom prst="rect">
+            <a:avLst/>
+          </a:prstGeom>
+          <a:noFill/>
+          <a:ln/>
+        </p:spPr>
+        <p:txBody>
+          <a:bodyPr wrap="square" rtlCol="0" anchor="ctr"/>
+          <a:lstStyle/>
+          <a:p>
+            <a:pPr indent="0" marL="0">
+              <a:buNone/>
+            </a:pPr>
+            <a:r>
+              <a:rPr lang="en-US" sz="800" dirty="0">
+                <a:solidFill>
+                  <a:srgbClr val="444466"/>
+                </a:solidFill>
+                <a:latin typeface="Microsoft YaHei" pitchFamily="34" charset="0"/>
+                <a:ea typeface="Microsoft YaHei" pitchFamily="34" charset="-122"/>
+                <a:cs typeface="Microsoft YaHei" pitchFamily="34" charset="-120"/>
+              </a:rPr>
+              <a:t>将复杂政策文件转化为通俗语言，辅助基层工作人员和公众理解</a:t>
+            </a:r>
+            <a:endParaRPr lang="en-US" sz="800" dirty="0"/>
+          </a:p>
+        </p:txBody>
+      </p:sp>
+      <p:sp>
+        <p:nvSpPr>
+          <p:cNvPr id="28" name="Shape 26"/>
+          <p:cNvSpPr/>
+          <p:nvPr/>
+        </p:nvSpPr>
+        <p:spPr>
+          <a:xfrm>
+            <a:off x="4846320" y="2167128"/>
+            <a:ext cx="54864" cy="320040"/>
+          </a:xfrm>
+          <a:prstGeom prst="rect">
+            <a:avLst/>
+          </a:prstGeom>
+          <a:solidFill>
+            <a:srgbClr val="1B3A5C"/>
+          </a:solidFill>
+          <a:ln/>
+        </p:spPr>
+      </p:sp>
+      <p:sp>
+        <p:nvSpPr>
+          <p:cNvPr id="29" name="Text 27"/>
+          <p:cNvSpPr/>
+          <p:nvPr/>
+        </p:nvSpPr>
+        <p:spPr>
+          <a:xfrm>
+            <a:off x="5074920" y="2148840"/>
+            <a:ext cx="1188720" cy="320040"/>
+          </a:xfrm>
+          <a:prstGeom prst="rect">
+            <a:avLst/>
+          </a:prstGeom>
+          <a:noFill/>
+          <a:ln/>
+        </p:spPr>
+        <p:txBody>
+          <a:bodyPr wrap="square" rtlCol="0" anchor="ctr"/>
+          <a:lstStyle/>
+          <a:p>
+            <a:pPr indent="0" marL="0">
+              <a:buNone/>
+            </a:pPr>
+            <a:r>
+              <a:rPr lang="en-US" sz="1000" b="1" dirty="0">
+                <a:solidFill>
+                  <a:srgbClr val="1B3A5C"/>
+                </a:solidFill>
+                <a:latin typeface="Microsoft YaHei" pitchFamily="34" charset="0"/>
+                <a:ea typeface="Microsoft YaHei" pitchFamily="34" charset="-122"/>
+                <a:cs typeface="Microsoft YaHei" pitchFamily="34" charset="-120"/>
+              </a:rPr>
+              <a:t>智能问答</a:t>
+            </a:r>
+            <a:endParaRPr lang="en-US" sz="1000" dirty="0"/>
+          </a:p>
+        </p:txBody>
+      </p:sp>
+      <p:sp>
+        <p:nvSpPr>
+          <p:cNvPr id="30" name="Text 28"/>
+          <p:cNvSpPr/>
+          <p:nvPr/>
+        </p:nvSpPr>
+        <p:spPr>
+          <a:xfrm>
+            <a:off x="6217920" y="2148840"/>
+            <a:ext cx="2468880" cy="320040"/>
+          </a:xfrm>
+          <a:prstGeom prst="rect">
+            <a:avLst/>
+          </a:prstGeom>
+          <a:noFill/>
+          <a:ln/>
+        </p:spPr>
+        <p:txBody>
+          <a:bodyPr wrap="square" rtlCol="0" anchor="ctr"/>
+          <a:lstStyle/>
+          <a:p>
+            <a:pPr indent="0" marL="0">
+              <a:buNone/>
+            </a:pPr>
+            <a:r>
+              <a:rPr lang="en-US" sz="800" dirty="0">
+                <a:solidFill>
+                  <a:srgbClr val="444466"/>
+                </a:solidFill>
+                <a:latin typeface="Microsoft YaHei" pitchFamily="34" charset="0"/>
+                <a:ea typeface="Microsoft YaHei" pitchFamily="34" charset="-122"/>
+                <a:cs typeface="Microsoft YaHei" pitchFamily="34" charset="-120"/>
+              </a:rPr>
+              <a:t>7x24小时政务咨询，覆盖社保、税务、工商等高频事项</a:t>
+            </a:r>
+            <a:endParaRPr lang="en-US" sz="800" dirty="0"/>
+          </a:p>
+        </p:txBody>
+      </p:sp>
+      <p:sp>
+        <p:nvSpPr>
+          <p:cNvPr id="31" name="Shape 29"/>
+          <p:cNvSpPr/>
+          <p:nvPr/>
+        </p:nvSpPr>
+        <p:spPr>
+          <a:xfrm>
+            <a:off x="4846320" y="2642616"/>
+            <a:ext cx="54864" cy="320040"/>
+          </a:xfrm>
+          <a:prstGeom prst="rect">
+            <a:avLst/>
+          </a:prstGeom>
+          <a:solidFill>
+            <a:srgbClr val="1B3A5C"/>
+          </a:solidFill>
+          <a:ln/>
+        </p:spPr>
+      </p:sp>
+      <p:sp>
+        <p:nvSpPr>
+          <p:cNvPr id="32" name="Text 30"/>
+          <p:cNvSpPr/>
+          <p:nvPr/>
+        </p:nvSpPr>
+        <p:spPr>
+          <a:xfrm>
+            <a:off x="5074920" y="2624328"/>
+            <a:ext cx="1188720" cy="320040"/>
+          </a:xfrm>
+          <a:prstGeom prst="rect">
+            <a:avLst/>
+          </a:prstGeom>
+          <a:noFill/>
+          <a:ln/>
+        </p:spPr>
+        <p:txBody>
+          <a:bodyPr wrap="square" rtlCol="0" anchor="ctr"/>
+          <a:lstStyle/>
+          <a:p>
+            <a:pPr indent="0" marL="0">
+              <a:buNone/>
+            </a:pPr>
+            <a:r>
+              <a:rPr lang="en-US" sz="1000" b="1" dirty="0">
+                <a:solidFill>
+                  <a:srgbClr val="1B3A5C"/>
+                </a:solidFill>
+                <a:latin typeface="Microsoft YaHei" pitchFamily="34" charset="0"/>
+                <a:ea typeface="Microsoft YaHei" pitchFamily="34" charset="-122"/>
+                <a:cs typeface="Microsoft YaHei" pitchFamily="34" charset="-120"/>
+              </a:rPr>
+              <a:t>公文写作</a:t>
+            </a:r>
+            <a:endParaRPr lang="en-US" sz="1000" dirty="0"/>
+          </a:p>
+        </p:txBody>
+      </p:sp>
+      <p:sp>
+        <p:nvSpPr>
+          <p:cNvPr id="33" name="Text 31"/>
+          <p:cNvSpPr/>
+          <p:nvPr/>
+        </p:nvSpPr>
+        <p:spPr>
+          <a:xfrm>
+            <a:off x="6217920" y="2624328"/>
+            <a:ext cx="2468880" cy="320040"/>
+          </a:xfrm>
+          <a:prstGeom prst="rect">
+            <a:avLst/>
+          </a:prstGeom>
+          <a:noFill/>
+          <a:ln/>
+        </p:spPr>
+        <p:txBody>
+          <a:bodyPr wrap="square" rtlCol="0" anchor="ctr"/>
+          <a:lstStyle/>
+          <a:p>
+            <a:pPr indent="0" marL="0">
+              <a:buNone/>
+            </a:pPr>
+            <a:r>
+              <a:rPr lang="en-US" sz="800" dirty="0">
+                <a:solidFill>
+                  <a:srgbClr val="444466"/>
+                </a:solidFill>
+                <a:latin typeface="Microsoft YaHei" pitchFamily="34" charset="0"/>
+                <a:ea typeface="Microsoft YaHei" pitchFamily="34" charset="-122"/>
+                <a:cs typeface="Microsoft YaHei" pitchFamily="34" charset="-120"/>
+              </a:rPr>
+              <a:t>辅助起草通知、报告、会议纪要等政务公文</a:t>
+            </a:r>
+            <a:endParaRPr lang="en-US" sz="800" dirty="0"/>
+          </a:p>
+        </p:txBody>
+      </p:sp>
+      <p:sp>
+        <p:nvSpPr>
+          <p:cNvPr id="34" name="Shape 32"/>
+          <p:cNvSpPr/>
+          <p:nvPr/>
+        </p:nvSpPr>
+        <p:spPr>
+          <a:xfrm>
+            <a:off x="4846320" y="3118104"/>
+            <a:ext cx="54864" cy="320040"/>
+          </a:xfrm>
+          <a:prstGeom prst="rect">
+            <a:avLst/>
+          </a:prstGeom>
+          <a:solidFill>
+            <a:srgbClr val="1B3A5C"/>
+          </a:solidFill>
+          <a:ln/>
+        </p:spPr>
+      </p:sp>
+      <p:sp>
+        <p:nvSpPr>
+          <p:cNvPr id="35" name="Text 33"/>
+          <p:cNvSpPr/>
+          <p:nvPr/>
+        </p:nvSpPr>
+        <p:spPr>
+          <a:xfrm>
+            <a:off x="5074920" y="3099816"/>
+            <a:ext cx="1188720" cy="320040"/>
+          </a:xfrm>
+          <a:prstGeom prst="rect">
+            <a:avLst/>
+          </a:prstGeom>
+          <a:noFill/>
+          <a:ln/>
+        </p:spPr>
+        <p:txBody>
+          <a:bodyPr wrap="square" rtlCol="0" anchor="ctr"/>
+          <a:lstStyle/>
+          <a:p>
+            <a:pPr indent="0" marL="0">
+              <a:buNone/>
+            </a:pPr>
+            <a:r>
+              <a:rPr lang="en-US" sz="1000" b="1" dirty="0">
+                <a:solidFill>
+                  <a:srgbClr val="1B3A5C"/>
+                </a:solidFill>
+                <a:latin typeface="Microsoft YaHei" pitchFamily="34" charset="0"/>
+                <a:ea typeface="Microsoft YaHei" pitchFamily="34" charset="-122"/>
+                <a:cs typeface="Microsoft YaHei" pitchFamily="34" charset="-120"/>
+              </a:rPr>
+              <a:t>数据分析</a:t>
+            </a:r>
+            <a:endParaRPr lang="en-US" sz="1000" dirty="0"/>
+          </a:p>
+        </p:txBody>
+      </p:sp>
+      <p:sp>
+        <p:nvSpPr>
+          <p:cNvPr id="36" name="Text 34"/>
+          <p:cNvSpPr/>
+          <p:nvPr/>
+        </p:nvSpPr>
+        <p:spPr>
+          <a:xfrm>
+            <a:off x="6217920" y="3099816"/>
+            <a:ext cx="2468880" cy="320040"/>
+          </a:xfrm>
+          <a:prstGeom prst="rect">
+            <a:avLst/>
+          </a:prstGeom>
+          <a:noFill/>
+          <a:ln/>
+        </p:spPr>
+        <p:txBody>
+          <a:bodyPr wrap="square" rtlCol="0" anchor="ctr"/>
+          <a:lstStyle/>
+          <a:p>
+            <a:pPr indent="0" marL="0">
+              <a:buNone/>
+            </a:pPr>
+            <a:r>
+              <a:rPr lang="en-US" sz="800" dirty="0">
+                <a:solidFill>
+                  <a:srgbClr val="444466"/>
+                </a:solidFill>
+                <a:latin typeface="Microsoft YaHei" pitchFamily="34" charset="0"/>
+                <a:ea typeface="Microsoft YaHei" pitchFamily="34" charset="-122"/>
+                <a:cs typeface="Microsoft YaHei" pitchFamily="34" charset="-120"/>
+              </a:rPr>
+              <a:t>自动分析政务数据报告，提炼关键洞察和趋势</a:t>
+            </a:r>
+            <a:endParaRPr lang="en-US" sz="800" dirty="0"/>
+          </a:p>
+        </p:txBody>
+      </p:sp>
+      <p:sp>
+        <p:nvSpPr>
+          <p:cNvPr id="37" name="Shape 35"/>
+          <p:cNvSpPr/>
+          <p:nvPr/>
+        </p:nvSpPr>
+        <p:spPr>
+          <a:xfrm>
+            <a:off x="4846320" y="3593592"/>
+            <a:ext cx="54864" cy="320040"/>
+          </a:xfrm>
+          <a:prstGeom prst="rect">
+            <a:avLst/>
+          </a:prstGeom>
+          <a:solidFill>
+            <a:srgbClr val="1B3A5C"/>
+          </a:solidFill>
+          <a:ln/>
+        </p:spPr>
+      </p:sp>
+      <p:sp>
+        <p:nvSpPr>
+          <p:cNvPr id="38" name="Text 36"/>
+          <p:cNvSpPr/>
+          <p:nvPr/>
+        </p:nvSpPr>
+        <p:spPr>
+          <a:xfrm>
+            <a:off x="5074920" y="3575304"/>
+            <a:ext cx="1188720" cy="320040"/>
+          </a:xfrm>
+          <a:prstGeom prst="rect">
+            <a:avLst/>
+          </a:prstGeom>
+          <a:noFill/>
+          <a:ln/>
+        </p:spPr>
+        <p:txBody>
+          <a:bodyPr wrap="square" rtlCol="0" anchor="ctr"/>
+          <a:lstStyle/>
+          <a:p>
+            <a:pPr indent="0" marL="0">
+              <a:buNone/>
+            </a:pPr>
+            <a:r>
+              <a:rPr lang="en-US" sz="1000" b="1" dirty="0">
+                <a:solidFill>
+                  <a:srgbClr val="1B3A5C"/>
+                </a:solidFill>
+                <a:latin typeface="Microsoft YaHei" pitchFamily="34" charset="0"/>
+                <a:ea typeface="Microsoft YaHei" pitchFamily="34" charset="-122"/>
+                <a:cs typeface="Microsoft YaHei" pitchFamily="34" charset="-120"/>
+              </a:rPr>
+              <a:t>舆情监测</a:t>
+            </a:r>
+            <a:endParaRPr lang="en-US" sz="1000" dirty="0"/>
+          </a:p>
+        </p:txBody>
+      </p:sp>
+      <p:sp>
+        <p:nvSpPr>
+          <p:cNvPr id="39" name="Text 37"/>
+          <p:cNvSpPr/>
+          <p:nvPr/>
+        </p:nvSpPr>
+        <p:spPr>
+          <a:xfrm>
+            <a:off x="6217920" y="3575304"/>
+            <a:ext cx="2468880" cy="320040"/>
+          </a:xfrm>
+          <a:prstGeom prst="rect">
+            <a:avLst/>
+          </a:prstGeom>
+          <a:noFill/>
+          <a:ln/>
+        </p:spPr>
+        <p:txBody>
+          <a:bodyPr wrap="square" rtlCol="0" anchor="ctr"/>
+          <a:lstStyle/>
+          <a:p>
+            <a:pPr indent="0" marL="0">
+              <a:buNone/>
+            </a:pPr>
+            <a:r>
+              <a:rPr lang="en-US" sz="800" dirty="0">
+                <a:solidFill>
+                  <a:srgbClr val="444466"/>
+                </a:solidFill>
+                <a:latin typeface="Microsoft YaHei" pitchFamily="34" charset="0"/>
+                <a:ea typeface="Microsoft YaHei" pitchFamily="34" charset="-122"/>
+                <a:cs typeface="Microsoft YaHei" pitchFamily="34" charset="-120"/>
+              </a:rPr>
+              <a:t>实时监测网络舆情，自动生成分析报告和应对建议</a:t>
+            </a:r>
+            <a:endParaRPr lang="en-US" sz="800" dirty="0"/>
+          </a:p>
+        </p:txBody>
+      </p:sp>
+      <p:sp>
+        <p:nvSpPr>
+          <p:cNvPr id="40" name="Shape 38"/>
+          <p:cNvSpPr/>
+          <p:nvPr/>
+        </p:nvSpPr>
+        <p:spPr>
+          <a:xfrm>
+            <a:off x="4846320" y="4069080"/>
+            <a:ext cx="54864" cy="320040"/>
+          </a:xfrm>
+          <a:prstGeom prst="rect">
+            <a:avLst/>
+          </a:prstGeom>
+          <a:solidFill>
+            <a:srgbClr val="1B3A5C"/>
+          </a:solidFill>
+          <a:ln/>
+        </p:spPr>
+      </p:sp>
+      <p:sp>
+        <p:nvSpPr>
+          <p:cNvPr id="41" name="Text 39"/>
+          <p:cNvSpPr/>
+          <p:nvPr/>
+        </p:nvSpPr>
+        <p:spPr>
+          <a:xfrm>
+            <a:off x="5074920" y="4050792"/>
+            <a:ext cx="1188720" cy="320040"/>
+          </a:xfrm>
+          <a:prstGeom prst="rect">
+            <a:avLst/>
+          </a:prstGeom>
+          <a:noFill/>
+          <a:ln/>
+        </p:spPr>
+        <p:txBody>
+          <a:bodyPr wrap="square" rtlCol="0" anchor="ctr"/>
+          <a:lstStyle/>
+          <a:p>
+            <a:pPr indent="0" marL="0">
+              <a:buNone/>
+            </a:pPr>
+            <a:r>
+              <a:rPr lang="en-US" sz="1000" b="1" dirty="0">
+                <a:solidFill>
+                  <a:srgbClr val="1B3A5C"/>
+                </a:solidFill>
+                <a:latin typeface="Microsoft YaHei" pitchFamily="34" charset="0"/>
+                <a:ea typeface="Microsoft YaHei" pitchFamily="34" charset="-122"/>
+                <a:cs typeface="Microsoft YaHei" pitchFamily="34" charset="-120"/>
+              </a:rPr>
+              <a:t>决策辅助</a:t>
+            </a:r>
+            <a:endParaRPr lang="en-US" sz="1000" dirty="0"/>
+          </a:p>
+        </p:txBody>
+      </p:sp>
+      <p:sp>
+        <p:nvSpPr>
+          <p:cNvPr id="42" name="Text 40"/>
+          <p:cNvSpPr/>
+          <p:nvPr/>
+        </p:nvSpPr>
+        <p:spPr>
+          <a:xfrm>
+            <a:off x="6217920" y="4050792"/>
+            <a:ext cx="2468880" cy="320040"/>
+          </a:xfrm>
+          <a:prstGeom prst="rect">
+            <a:avLst/>
+          </a:prstGeom>
+          <a:noFill/>
+          <a:ln/>
+        </p:spPr>
+        <p:txBody>
+          <a:bodyPr wrap="square" rtlCol="0" anchor="ctr"/>
+          <a:lstStyle/>
+          <a:p>
+            <a:pPr indent="0" marL="0">
+              <a:buNone/>
+            </a:pPr>
+            <a:r>
+              <a:rPr lang="en-US" sz="800" dirty="0">
+                <a:solidFill>
+                  <a:srgbClr val="444466"/>
+                </a:solidFill>
+                <a:latin typeface="Microsoft YaHei" pitchFamily="34" charset="0"/>
+                <a:ea typeface="Microsoft YaHei" pitchFamily="34" charset="-122"/>
+                <a:cs typeface="Microsoft YaHei" pitchFamily="34" charset="-120"/>
+              </a:rPr>
+              <a:t>基于历史数据和模型推演，为政策制定提供量化参考</a:t>
+            </a:r>
+            <a:endParaRPr lang="en-US" sz="800" dirty="0"/>
+          </a:p>
+        </p:txBody>
+      </p:sp>
+    </p:spTree>
+  </p:cSld>
+  <p:clrMapOvr>
+    <a:masterClrMapping/>
+  </p:clrMapOvr>
+</p:sld>
+</file>
+
+<file path=ppt/slides/slide28.xml><?xml version="1.0" encoding="utf-8"?>
+<p:sld xmlns:a="http://schemas.openxmlformats.org/drawingml/2006/main" xmlns:r="http://schemas.openxmlformats.org/officeDocument/2006/relationships" xmlns:p="http://schemas.openxmlformats.org/presentationml/2006/main">
+  <p:cSld name="Slide 3">
+    <p:bg>
+      <p:bgPr>
+        <a:solidFill>
+          <a:srgbClr val="F5F7FA"/>
+        </a:solidFill>
+      </p:bgPr>
+    </p:bg>
+    <p:spTree>
+      <p:nvGrpSpPr>
+        <p:cNvPr id="1" name=""/>
+        <p:cNvGrpSpPr/>
+        <p:nvPr/>
+      </p:nvGrpSpPr>
+      <p:grpSpPr>
+        <a:xfrm>
+          <a:off x="0" y="0"/>
+          <a:ext cx="0" cy="0"/>
+          <a:chOff x="0" y="0"/>
+          <a:chExt cx="0" cy="0"/>
+        </a:xfrm>
+      </p:grpSpPr>
+      <p:sp>
+        <p:nvSpPr>
+          <p:cNvPr id="2" name="Shape 0"/>
+          <p:cNvSpPr/>
+          <p:nvPr/>
+        </p:nvSpPr>
+        <p:spPr>
+          <a:xfrm>
+            <a:off x="0" y="0"/>
+            <a:ext cx="9144000" cy="822960"/>
+          </a:xfrm>
+          <a:prstGeom prst="rect">
+            <a:avLst/>
+          </a:prstGeom>
+          <a:solidFill>
+            <a:srgbClr val="1B3A5C"/>
+          </a:solidFill>
+          <a:ln/>
+        </p:spPr>
+      </p:sp>
+      <p:sp>
+        <p:nvSpPr>
+          <p:cNvPr id="3" name="Text 1"/>
+          <p:cNvSpPr/>
+          <p:nvPr/>
+        </p:nvSpPr>
+        <p:spPr>
+          <a:xfrm>
+            <a:off x="365760" y="109728"/>
+            <a:ext cx="457200" cy="594360"/>
+          </a:xfrm>
+          <a:prstGeom prst="rect">
+            <a:avLst/>
+          </a:prstGeom>
+          <a:noFill/>
+          <a:ln/>
+        </p:spPr>
+        <p:txBody>
+          <a:bodyPr wrap="square" rtlCol="0" anchor="ctr"/>
+          <a:lstStyle/>
+          <a:p>
+            <a:pPr algn="ctr" indent="0" marL="0">
+              <a:buNone/>
+            </a:pPr>
+            <a:r>
+              <a:rPr lang="en-US" sz="2000" b="1" dirty="0">
+                <a:solidFill>
+                  <a:srgbClr val="C99A2A"/>
+                </a:solidFill>
+                <a:latin typeface="Georgia" pitchFamily="34" charset="0"/>
+                <a:ea typeface="Georgia" pitchFamily="34" charset="-122"/>
+                <a:cs typeface="Georgia" pitchFamily="34" charset="-120"/>
+              </a:rPr>
+              <a:t>14</a:t>
+            </a:r>
+            <a:endParaRPr lang="en-US" sz="2000" dirty="0"/>
+          </a:p>
+        </p:txBody>
+      </p:sp>
+      <p:sp>
+        <p:nvSpPr>
+          <p:cNvPr id="4" name="Text 2"/>
+          <p:cNvSpPr/>
+          <p:nvPr/>
+        </p:nvSpPr>
+        <p:spPr>
+          <a:xfrm>
+            <a:off x="868680" y="109728"/>
+            <a:ext cx="7772400" cy="594360"/>
+          </a:xfrm>
+          <a:prstGeom prst="rect">
+            <a:avLst/>
+          </a:prstGeom>
+          <a:noFill/>
+          <a:ln/>
+        </p:spPr>
+        <p:txBody>
+          <a:bodyPr wrap="square" rtlCol="0" anchor="ctr"/>
+          <a:lstStyle/>
+          <a:p>
+            <a:pPr indent="0" marL="0">
+              <a:buNone/>
+            </a:pPr>
+            <a:r>
+              <a:rPr lang="en-US" sz="2000" b="1" dirty="0">
+                <a:solidFill>
+                  <a:srgbClr val="FFFFFF"/>
+                </a:solidFill>
+                <a:latin typeface="Georgia" pitchFamily="34" charset="0"/>
+                <a:ea typeface="Georgia" pitchFamily="34" charset="-122"/>
+                <a:cs typeface="Georgia" pitchFamily="34" charset="-120"/>
+              </a:rPr>
+              <a:t>区级政府的AI落地：三条可行路径</a:t>
+            </a:r>
+            <a:endParaRPr lang="en-US" sz="2000" dirty="0"/>
+          </a:p>
+        </p:txBody>
+      </p:sp>
+      <p:sp>
+        <p:nvSpPr>
+          <p:cNvPr id="5" name="Shape 3"/>
+          <p:cNvSpPr/>
+          <p:nvPr/>
+        </p:nvSpPr>
+        <p:spPr>
+          <a:xfrm>
+            <a:off x="0" y="822960"/>
+            <a:ext cx="9144000" cy="27432"/>
+          </a:xfrm>
+          <a:prstGeom prst="rect">
+            <a:avLst/>
+          </a:prstGeom>
+          <a:solidFill>
+            <a:srgbClr val="C99A2A"/>
+          </a:solidFill>
+          <a:ln/>
+        </p:spPr>
+      </p:sp>
+      <p:sp>
+        <p:nvSpPr>
+          <p:cNvPr id="6" name="Text 4"/>
+          <p:cNvSpPr/>
+          <p:nvPr/>
+        </p:nvSpPr>
+        <p:spPr>
+          <a:xfrm>
+            <a:off x="8229600" y="4800600"/>
+            <a:ext cx="640080" cy="274320"/>
+          </a:xfrm>
+          <a:prstGeom prst="rect">
+            <a:avLst/>
+          </a:prstGeom>
+          <a:noFill/>
+          <a:ln/>
+        </p:spPr>
+        <p:txBody>
+          <a:bodyPr wrap="square" rtlCol="0" anchor="ctr"/>
+          <a:lstStyle/>
+          <a:p>
+            <a:pPr algn="r" indent="0" marL="0">
+              <a:buNone/>
+            </a:pPr>
+            <a:r>
+              <a:rPr lang="en-US" sz="900" dirty="0">
+                <a:solidFill>
+                  <a:srgbClr val="888899"/>
+                </a:solidFill>
+                <a:latin typeface="Georgia" pitchFamily="34" charset="0"/>
+                <a:ea typeface="Georgia" pitchFamily="34" charset="-122"/>
+                <a:cs typeface="Georgia" pitchFamily="34" charset="-120"/>
+              </a:rPr>
+              <a:t>15</a:t>
+            </a:r>
+            <a:endParaRPr lang="en-US" sz="900" dirty="0"/>
+          </a:p>
+        </p:txBody>
+      </p:sp>
+      <p:sp>
+        <p:nvSpPr>
+          <p:cNvPr id="7" name="Shape 5"/>
+          <p:cNvSpPr/>
+          <p:nvPr/>
+        </p:nvSpPr>
+        <p:spPr>
+          <a:xfrm>
+            <a:off x="365760" y="1097280"/>
+            <a:ext cx="2697480" cy="3291840"/>
+          </a:xfrm>
+          <a:prstGeom prst="rect">
+            <a:avLst/>
+          </a:prstGeom>
+          <a:solidFill>
+            <a:srgbClr val="FFFFFF"/>
+          </a:solidFill>
+          <a:ln/>
+          <a:effectLst>
+            <a:outerShdw sx="100000" sy="100000" kx="0" ky="0" algn="bl" rotWithShape="0" blurRad="101600" dist="25400" dir="8100000">
+              <a:srgbClr val="000000">
+                <a:alpha val="10000"/>
+              </a:srgbClr>
+            </a:outerShdw>
+          </a:effectLst>
+        </p:spPr>
+      </p:sp>
+      <p:sp>
+        <p:nvSpPr>
+          <p:cNvPr id="8" name="Shape 6"/>
+          <p:cNvSpPr/>
+          <p:nvPr/>
+        </p:nvSpPr>
+        <p:spPr>
+          <a:xfrm>
+            <a:off x="365760" y="1097280"/>
+            <a:ext cx="2697480" cy="502920"/>
+          </a:xfrm>
+          <a:prstGeom prst="rect">
+            <a:avLst/>
+          </a:prstGeom>
+          <a:solidFill>
+            <a:srgbClr val="1B3A5C"/>
+          </a:solidFill>
+          <a:ln/>
+        </p:spPr>
+      </p:sp>
+      <p:sp>
+        <p:nvSpPr>
+          <p:cNvPr id="9" name="Text 7"/>
+          <p:cNvSpPr/>
+          <p:nvPr/>
+        </p:nvSpPr>
+        <p:spPr>
+          <a:xfrm>
+            <a:off x="457200" y="1115568"/>
+            <a:ext cx="365760" cy="228600"/>
+          </a:xfrm>
+          <a:prstGeom prst="rect">
+            <a:avLst/>
+          </a:prstGeom>
+          <a:noFill/>
+          <a:ln/>
+        </p:spPr>
+        <p:txBody>
+          <a:bodyPr wrap="square" rtlCol="0" anchor="ctr"/>
+          <a:lstStyle/>
+          <a:p>
+            <a:pPr indent="0" marL="0">
+              <a:buNone/>
+            </a:pPr>
+            <a:r>
+              <a:rPr lang="en-US" sz="1400" b="1" dirty="0">
+                <a:solidFill>
+                  <a:srgbClr val="FFFFFF"/>
+                </a:solidFill>
+                <a:latin typeface="Georgia" pitchFamily="34" charset="0"/>
+                <a:ea typeface="Georgia" pitchFamily="34" charset="-122"/>
+                <a:cs typeface="Georgia" pitchFamily="34" charset="-120"/>
+              </a:rPr>
+              <a:t>01</a:t>
+            </a:r>
+            <a:endParaRPr lang="en-US" sz="1400" dirty="0"/>
+          </a:p>
+        </p:txBody>
+      </p:sp>
+      <p:sp>
+        <p:nvSpPr>
+          <p:cNvPr id="10" name="Text 8"/>
+          <p:cNvSpPr/>
+          <p:nvPr/>
+        </p:nvSpPr>
+        <p:spPr>
+          <a:xfrm>
+            <a:off x="822960" y="1115568"/>
+            <a:ext cx="2103120" cy="228600"/>
+          </a:xfrm>
+          <a:prstGeom prst="rect">
+            <a:avLst/>
+          </a:prstGeom>
+          <a:noFill/>
+          <a:ln/>
+        </p:spPr>
+        <p:txBody>
+          <a:bodyPr wrap="square" rtlCol="0" anchor="ctr"/>
+          <a:lstStyle/>
+          <a:p>
+            <a:pPr indent="0" marL="0">
+              <a:buNone/>
+            </a:pPr>
+            <a:r>
+              <a:rPr lang="en-US" sz="1100" b="1" dirty="0">
+                <a:solidFill>
+                  <a:srgbClr val="FFFFFF"/>
+                </a:solidFill>
+                <a:latin typeface="Microsoft YaHei" pitchFamily="34" charset="0"/>
+                <a:ea typeface="Microsoft YaHei" pitchFamily="34" charset="-122"/>
+                <a:cs typeface="Microsoft YaHei" pitchFamily="34" charset="-120"/>
+              </a:rPr>
+              <a:t>借力·接入城市级AI平台</a:t>
+            </a:r>
+            <a:endParaRPr lang="en-US" sz="1100" dirty="0"/>
+          </a:p>
+        </p:txBody>
+      </p:sp>
+      <p:sp>
+        <p:nvSpPr>
+          <p:cNvPr id="11" name="Shape 9"/>
+          <p:cNvSpPr/>
+          <p:nvPr/>
+        </p:nvSpPr>
+        <p:spPr>
+          <a:xfrm>
+            <a:off x="457200" y="1691640"/>
+            <a:ext cx="2514600" cy="9144"/>
+          </a:xfrm>
+          <a:prstGeom prst="rect">
+            <a:avLst/>
+          </a:prstGeom>
+          <a:solidFill>
+            <a:srgbClr val="D6E8F7"/>
+          </a:solidFill>
+          <a:ln/>
+        </p:spPr>
+      </p:sp>
+      <p:sp>
+        <p:nvSpPr>
+          <p:cNvPr id="12" name="Text 10"/>
+          <p:cNvSpPr/>
+          <p:nvPr/>
+        </p:nvSpPr>
+        <p:spPr>
+          <a:xfrm>
+            <a:off x="502920" y="1828800"/>
+            <a:ext cx="2423160" cy="2286000"/>
+          </a:xfrm>
+          <a:prstGeom prst="rect">
+            <a:avLst/>
+          </a:prstGeom>
+          <a:noFill/>
+          <a:ln/>
+        </p:spPr>
+        <p:txBody>
+          <a:bodyPr wrap="square" rtlCol="0" anchor="t"/>
+          <a:lstStyle/>
+          <a:p>
+            <a:pPr indent="0" marL="0">
+              <a:buNone/>
+            </a:pPr>
+            <a:r>
+              <a:rPr lang="en-US" sz="1000" dirty="0">
+                <a:solidFill>
+                  <a:srgbClr val="444466"/>
+                </a:solidFill>
+                <a:latin typeface="Microsoft YaHei" pitchFamily="34" charset="0"/>
+                <a:ea typeface="Microsoft YaHei" pitchFamily="34" charset="-122"/>
+                <a:cs typeface="Microsoft YaHei" pitchFamily="34" charset="-120"/>
+              </a:rPr>
+              <a:t>利用省/市级已建成的政务大模型能力API，直接在区和街道层面调用智能问答、公文辅助、热线分析等能力。</a:t>
+            </a:r>
+            <a:endParaRPr lang="en-US" sz="1000" dirty="0"/>
+          </a:p>
+          <a:p>
+            <a:pPr indent="0" marL="0">
+              <a:buNone/>
+            </a:pPr>
+            <a:r>
+              <a:rPr lang="en-US" sz="1000" dirty="0">
+                <a:solidFill>
+                  <a:srgbClr val="444466"/>
+                </a:solidFill>
+                <a:latin typeface="Microsoft YaHei" pitchFamily="34" charset="0"/>
+                <a:ea typeface="Microsoft YaHei" pitchFamily="34" charset="-122"/>
+                <a:cs typeface="Microsoft YaHei" pitchFamily="34" charset="-120"/>
+              </a:rPr>
+              <a:t>成本最低、见效最快</a:t>
+            </a:r>
+            <a:endParaRPr lang="en-US" sz="1000" dirty="0"/>
+          </a:p>
+        </p:txBody>
+      </p:sp>
+      <p:sp>
+        <p:nvSpPr>
+          <p:cNvPr id="13" name="Shape 11"/>
+          <p:cNvSpPr/>
+          <p:nvPr/>
+        </p:nvSpPr>
+        <p:spPr>
+          <a:xfrm>
+            <a:off x="3246120" y="1097280"/>
+            <a:ext cx="2697480" cy="3291840"/>
+          </a:xfrm>
+          <a:prstGeom prst="rect">
+            <a:avLst/>
+          </a:prstGeom>
+          <a:solidFill>
+            <a:srgbClr val="FFFFFF"/>
+          </a:solidFill>
+          <a:ln/>
+          <a:effectLst>
+            <a:outerShdw sx="100000" sy="100000" kx="0" ky="0" algn="bl" rotWithShape="0" blurRad="101600" dist="25400" dir="8100000">
+              <a:srgbClr val="000000">
+                <a:alpha val="10000"/>
+              </a:srgbClr>
+            </a:outerShdw>
+          </a:effectLst>
+        </p:spPr>
+      </p:sp>
+      <p:sp>
+        <p:nvSpPr>
+          <p:cNvPr id="14" name="Shape 12"/>
+          <p:cNvSpPr/>
+          <p:nvPr/>
+        </p:nvSpPr>
+        <p:spPr>
+          <a:xfrm>
+            <a:off x="3246120" y="1097280"/>
+            <a:ext cx="2697480" cy="502920"/>
+          </a:xfrm>
+          <a:prstGeom prst="rect">
+            <a:avLst/>
+          </a:prstGeom>
+          <a:solidFill>
+            <a:srgbClr val="2C5F8A"/>
+          </a:solidFill>
+          <a:ln/>
+        </p:spPr>
+      </p:sp>
+      <p:sp>
+        <p:nvSpPr>
+          <p:cNvPr id="15" name="Text 13"/>
+          <p:cNvSpPr/>
+          <p:nvPr/>
+        </p:nvSpPr>
+        <p:spPr>
+          <a:xfrm>
+            <a:off x="3337560" y="1115568"/>
+            <a:ext cx="365760" cy="228600"/>
+          </a:xfrm>
+          <a:prstGeom prst="rect">
+            <a:avLst/>
+          </a:prstGeom>
+          <a:noFill/>
+          <a:ln/>
+        </p:spPr>
+        <p:txBody>
+          <a:bodyPr wrap="square" rtlCol="0" anchor="ctr"/>
+          <a:lstStyle/>
+          <a:p>
+            <a:pPr indent="0" marL="0">
+              <a:buNone/>
+            </a:pPr>
+            <a:r>
+              <a:rPr lang="en-US" sz="1400" b="1" dirty="0">
+                <a:solidFill>
+                  <a:srgbClr val="FFFFFF"/>
+                </a:solidFill>
+                <a:latin typeface="Georgia" pitchFamily="34" charset="0"/>
+                <a:ea typeface="Georgia" pitchFamily="34" charset="-122"/>
+                <a:cs typeface="Georgia" pitchFamily="34" charset="-120"/>
+              </a:rPr>
+              <a:t>02</a:t>
+            </a:r>
+            <a:endParaRPr lang="en-US" sz="1400" dirty="0"/>
+          </a:p>
+        </p:txBody>
+      </p:sp>
+      <p:sp>
+        <p:nvSpPr>
+          <p:cNvPr id="16" name="Text 14"/>
+          <p:cNvSpPr/>
+          <p:nvPr/>
+        </p:nvSpPr>
+        <p:spPr>
+          <a:xfrm>
+            <a:off x="3703320" y="1115568"/>
+            <a:ext cx="2103120" cy="228600"/>
+          </a:xfrm>
+          <a:prstGeom prst="rect">
+            <a:avLst/>
+          </a:prstGeom>
+          <a:noFill/>
+          <a:ln/>
+        </p:spPr>
+        <p:txBody>
+          <a:bodyPr wrap="square" rtlCol="0" anchor="ctr"/>
+          <a:lstStyle/>
+          <a:p>
+            <a:pPr indent="0" marL="0">
+              <a:buNone/>
+            </a:pPr>
+            <a:r>
+              <a:rPr lang="en-US" sz="1100" b="1" dirty="0">
+                <a:solidFill>
+                  <a:srgbClr val="FFFFFF"/>
+                </a:solidFill>
+                <a:latin typeface="Microsoft YaHei" pitchFamily="34" charset="0"/>
+                <a:ea typeface="Microsoft YaHei" pitchFamily="34" charset="-122"/>
+                <a:cs typeface="Microsoft YaHei" pitchFamily="34" charset="-120"/>
+              </a:rPr>
+              <a:t>试点·垂直场景自建模型</a:t>
+            </a:r>
+            <a:endParaRPr lang="en-US" sz="1100" dirty="0"/>
+          </a:p>
+        </p:txBody>
+      </p:sp>
+      <p:sp>
+        <p:nvSpPr>
+          <p:cNvPr id="17" name="Shape 15"/>
+          <p:cNvSpPr/>
+          <p:nvPr/>
+        </p:nvSpPr>
+        <p:spPr>
+          <a:xfrm>
+            <a:off x="3337560" y="1691640"/>
+            <a:ext cx="2514600" cy="9144"/>
+          </a:xfrm>
+          <a:prstGeom prst="rect">
+            <a:avLst/>
+          </a:prstGeom>
+          <a:solidFill>
+            <a:srgbClr val="D6E8F7"/>
+          </a:solidFill>
+          <a:ln/>
+        </p:spPr>
+      </p:sp>
+      <p:sp>
+        <p:nvSpPr>
+          <p:cNvPr id="18" name="Text 16"/>
+          <p:cNvSpPr/>
+          <p:nvPr/>
+        </p:nvSpPr>
+        <p:spPr>
+          <a:xfrm>
+            <a:off x="3383280" y="1828800"/>
+            <a:ext cx="2423160" cy="2286000"/>
+          </a:xfrm>
+          <a:prstGeom prst="rect">
+            <a:avLst/>
+          </a:prstGeom>
+          <a:noFill/>
+          <a:ln/>
+        </p:spPr>
+        <p:txBody>
+          <a:bodyPr wrap="square" rtlCol="0" anchor="t"/>
+          <a:lstStyle/>
+          <a:p>
+            <a:pPr indent="0" marL="0">
+              <a:buNone/>
+            </a:pPr>
+            <a:r>
+              <a:rPr lang="en-US" sz="1000" dirty="0">
+                <a:solidFill>
+                  <a:srgbClr val="444466"/>
+                </a:solidFill>
+                <a:latin typeface="Microsoft YaHei" pitchFamily="34" charset="0"/>
+                <a:ea typeface="Microsoft YaHei" pitchFamily="34" charset="-122"/>
+                <a:cs typeface="Microsoft YaHei" pitchFamily="34" charset="-120"/>
+              </a:rPr>
+              <a:t>在某一高频场景（如城市管理图像识别、12345智能分类）用本地数据微调模型。需配备基础算力和数据标注能力。可积累数据资产</a:t>
+            </a:r>
+            <a:endParaRPr lang="en-US" sz="1000" dirty="0"/>
+          </a:p>
+        </p:txBody>
+      </p:sp>
+      <p:sp>
+        <p:nvSpPr>
+          <p:cNvPr id="19" name="Shape 17"/>
+          <p:cNvSpPr/>
+          <p:nvPr/>
+        </p:nvSpPr>
+        <p:spPr>
+          <a:xfrm>
+            <a:off x="6126480" y="1097280"/>
+            <a:ext cx="2697480" cy="3291840"/>
+          </a:xfrm>
+          <a:prstGeom prst="rect">
+            <a:avLst/>
+          </a:prstGeom>
+          <a:solidFill>
+            <a:srgbClr val="FFFFFF"/>
+          </a:solidFill>
+          <a:ln/>
+          <a:effectLst>
+            <a:outerShdw sx="100000" sy="100000" kx="0" ky="0" algn="bl" rotWithShape="0" blurRad="101600" dist="25400" dir="8100000">
+              <a:srgbClr val="000000">
+                <a:alpha val="10000"/>
+              </a:srgbClr>
+            </a:outerShdw>
+          </a:effectLst>
+        </p:spPr>
+      </p:sp>
+      <p:sp>
+        <p:nvSpPr>
+          <p:cNvPr id="20" name="Shape 18"/>
+          <p:cNvSpPr/>
+          <p:nvPr/>
+        </p:nvSpPr>
+        <p:spPr>
+          <a:xfrm>
+            <a:off x="6126480" y="1097280"/>
+            <a:ext cx="2697480" cy="502920"/>
+          </a:xfrm>
+          <a:prstGeom prst="rect">
+            <a:avLst/>
+          </a:prstGeom>
+          <a:solidFill>
+            <a:srgbClr val="4A8BC2"/>
+          </a:solidFill>
+          <a:ln/>
+        </p:spPr>
+      </p:sp>
+      <p:sp>
+        <p:nvSpPr>
+          <p:cNvPr id="21" name="Text 19"/>
+          <p:cNvSpPr/>
+          <p:nvPr/>
+        </p:nvSpPr>
+        <p:spPr>
+          <a:xfrm>
+            <a:off x="6217920" y="1115568"/>
+            <a:ext cx="365760" cy="228600"/>
+          </a:xfrm>
+          <a:prstGeom prst="rect">
+            <a:avLst/>
+          </a:prstGeom>
+          <a:noFill/>
+          <a:ln/>
+        </p:spPr>
+        <p:txBody>
+          <a:bodyPr wrap="square" rtlCol="0" anchor="ctr"/>
+          <a:lstStyle/>
+          <a:p>
+            <a:pPr indent="0" marL="0">
+              <a:buNone/>
+            </a:pPr>
+            <a:r>
+              <a:rPr lang="en-US" sz="1400" b="1" dirty="0">
+                <a:solidFill>
+                  <a:srgbClr val="FFFFFF"/>
+                </a:solidFill>
+                <a:latin typeface="Georgia" pitchFamily="34" charset="0"/>
+                <a:ea typeface="Georgia" pitchFamily="34" charset="-122"/>
+                <a:cs typeface="Georgia" pitchFamily="34" charset="-120"/>
+              </a:rPr>
+              <a:t>03</a:t>
+            </a:r>
+            <a:endParaRPr lang="en-US" sz="1400" dirty="0"/>
+          </a:p>
+        </p:txBody>
+      </p:sp>
+      <p:sp>
+        <p:nvSpPr>
+          <p:cNvPr id="22" name="Text 20"/>
+          <p:cNvSpPr/>
+          <p:nvPr/>
+        </p:nvSpPr>
+        <p:spPr>
+          <a:xfrm>
+            <a:off x="6583680" y="1115568"/>
+            <a:ext cx="2103120" cy="228600"/>
+          </a:xfrm>
+          <a:prstGeom prst="rect">
+            <a:avLst/>
+          </a:prstGeom>
+          <a:noFill/>
+          <a:ln/>
+        </p:spPr>
+        <p:txBody>
+          <a:bodyPr wrap="square" rtlCol="0" anchor="ctr"/>
+          <a:lstStyle/>
+          <a:p>
+            <a:pPr indent="0" marL="0">
+              <a:buNone/>
+            </a:pPr>
+            <a:r>
+              <a:rPr lang="en-US" sz="1100" b="1" dirty="0">
+                <a:solidFill>
+                  <a:srgbClr val="FFFFFF"/>
+                </a:solidFill>
+                <a:latin typeface="Microsoft YaHei" pitchFamily="34" charset="0"/>
+                <a:ea typeface="Microsoft YaHei" pitchFamily="34" charset="-122"/>
+                <a:cs typeface="Microsoft YaHei" pitchFamily="34" charset="-120"/>
+              </a:rPr>
+              <a:t>整合·AI+一网统管</a:t>
+            </a:r>
+            <a:endParaRPr lang="en-US" sz="1100" dirty="0"/>
+          </a:p>
+        </p:txBody>
+      </p:sp>
+      <p:sp>
+        <p:nvSpPr>
+          <p:cNvPr id="23" name="Shape 21"/>
+          <p:cNvSpPr/>
+          <p:nvPr/>
+        </p:nvSpPr>
+        <p:spPr>
+          <a:xfrm>
+            <a:off x="6217920" y="1691640"/>
+            <a:ext cx="2514600" cy="9144"/>
+          </a:xfrm>
+          <a:prstGeom prst="rect">
+            <a:avLst/>
+          </a:prstGeom>
+          <a:solidFill>
+            <a:srgbClr val="D6E8F7"/>
+          </a:solidFill>
+          <a:ln/>
+        </p:spPr>
+      </p:sp>
+      <p:sp>
+        <p:nvSpPr>
+          <p:cNvPr id="24" name="Text 22"/>
+          <p:cNvSpPr/>
+          <p:nvPr/>
+        </p:nvSpPr>
+        <p:spPr>
+          <a:xfrm>
+            <a:off x="6263640" y="1828800"/>
+            <a:ext cx="2423160" cy="2286000"/>
+          </a:xfrm>
+          <a:prstGeom prst="rect">
+            <a:avLst/>
+          </a:prstGeom>
+          <a:noFill/>
+          <a:ln/>
+        </p:spPr>
+        <p:txBody>
+          <a:bodyPr wrap="square" rtlCol="0" anchor="t"/>
+          <a:lstStyle/>
+          <a:p>
+            <a:pPr indent="0" marL="0">
+              <a:buNone/>
+            </a:pPr>
+            <a:r>
+              <a:rPr lang="en-US" sz="1000" dirty="0">
+                <a:solidFill>
+                  <a:srgbClr val="444466"/>
+                </a:solidFill>
+                <a:latin typeface="Microsoft YaHei" pitchFamily="34" charset="0"/>
+                <a:ea typeface="Microsoft YaHei" pitchFamily="34" charset="-122"/>
+                <a:cs typeface="Microsoft YaHei" pitchFamily="34" charset="-120"/>
+              </a:rPr>
+              <a:t>将AI能力嵌入现有的一网统管平台中，让AI成为城市治理的智能副驾驶。不建新平台，盘活存量资产</a:t>
+            </a:r>
+            <a:endParaRPr lang="en-US" sz="1000" dirty="0"/>
+          </a:p>
+        </p:txBody>
+      </p:sp>
+      <p:sp>
+        <p:nvSpPr>
+          <p:cNvPr id="25" name="Shape 23"/>
+          <p:cNvSpPr/>
+          <p:nvPr/>
+        </p:nvSpPr>
+        <p:spPr>
+          <a:xfrm>
+            <a:off x="365760" y="4572000"/>
+            <a:ext cx="8412480" cy="320040"/>
+          </a:xfrm>
+          <a:prstGeom prst="rect">
+            <a:avLst/>
+          </a:prstGeom>
+          <a:solidFill>
+            <a:srgbClr val="C99A2A"/>
+          </a:solidFill>
+          <a:ln/>
+        </p:spPr>
+      </p:sp>
+      <p:sp>
+        <p:nvSpPr>
+          <p:cNvPr id="26" name="Text 24"/>
+          <p:cNvSpPr/>
+          <p:nvPr/>
+        </p:nvSpPr>
+        <p:spPr>
+          <a:xfrm>
+            <a:off x="548640" y="4590288"/>
+            <a:ext cx="8046720" cy="274320"/>
+          </a:xfrm>
+          <a:prstGeom prst="rect">
+            <a:avLst/>
+          </a:prstGeom>
+          <a:noFill/>
+          <a:ln/>
+        </p:spPr>
+        <p:txBody>
+          <a:bodyPr wrap="square" rtlCol="0" anchor="ctr"/>
+          <a:lstStyle/>
+          <a:p>
+            <a:pPr indent="0" marL="0">
+              <a:buNone/>
+            </a:pPr>
+            <a:r>
+              <a:rPr lang="en-US" sz="1000" b="1" dirty="0">
+                <a:solidFill>
+                  <a:srgbClr val="FFFFFF"/>
+                </a:solidFill>
+                <a:latin typeface="Microsoft YaHei" pitchFamily="34" charset="0"/>
+                <a:ea typeface="Microsoft YaHei" pitchFamily="34" charset="-122"/>
+                <a:cs typeface="Microsoft YaHei" pitchFamily="34" charset="-120"/>
+              </a:rPr>
+              <a:t>关键提醒：AI是“副驾驶”不是“驾驶员”——最终决策权和行政责任必须由公务员承担</a:t>
+            </a:r>
+            <a:endParaRPr lang="en-US" sz="1000" dirty="0"/>
+          </a:p>
+        </p:txBody>
+      </p:sp>
+    </p:spTree>
+  </p:cSld>
+  <p:clrMapOvr>
+    <a:masterClrMapping/>
+  </p:clrMapOvr>
+</p:sld>
+</file>
+
 <file path=ppt/slides/slide3.xml><?xml version="1.0" encoding="utf-8"?>
 <p:sld xmlns:a="http://schemas.openxmlformats.org/drawingml/2006/main" xmlns:r="http://schemas.openxmlformats.org/officeDocument/2006/relationships" xmlns:p="http://schemas.openxmlformats.org/presentationml/2006/main">
   <p:cSld name="Slide 3">
